--- a/insights/260807-CoC-KN/awesome-agentic-landscape/awesome_agentic_landscape_trends_2026.pptx
+++ b/insights/260807-CoC-KN/awesome-agentic-landscape/awesome_agentic_landscape_trends_2026.pptx
@@ -2,21 +2,21 @@
 <file path=ppt/presentation.xml><?xml version="1.0" encoding="utf-8"?>
 <p:presentation xmlns:p="http://schemas.openxmlformats.org/presentationml/2006/main">
   <p:sldMasterIdLst>
-    <p:sldMasterId xmlns:r="http://schemas.openxmlformats.org/officeDocument/2006/relationships" id="2147483648" r:id="R4b265e25a3fc4157"/>
+    <p:sldMasterId xmlns:r="http://schemas.openxmlformats.org/officeDocument/2006/relationships" id="2147483648" r:id="Rd5c879d0b7774ae1"/>
   </p:sldMasterIdLst>
   <p:notesMasterIdLst>
-    <p:notesMasterId xmlns:r="http://schemas.openxmlformats.org/officeDocument/2006/relationships" r:id="Reda66adc410b4594"/>
+    <p:notesMasterId xmlns:r="http://schemas.openxmlformats.org/officeDocument/2006/relationships" r:id="Rdb236a21377d4401"/>
   </p:notesMasterIdLst>
   <p:sldIdLst>
-    <p:sldId xmlns:r="http://schemas.openxmlformats.org/officeDocument/2006/relationships" id="256" r:id="R80a7ced04bcd4e90"/>
-    <p:sldId xmlns:r="http://schemas.openxmlformats.org/officeDocument/2006/relationships" id="257" r:id="Ra3e2df3093854ac3"/>
-    <p:sldId xmlns:r="http://schemas.openxmlformats.org/officeDocument/2006/relationships" id="258" r:id="R68d98d6aba7d4752"/>
-    <p:sldId xmlns:r="http://schemas.openxmlformats.org/officeDocument/2006/relationships" id="259" r:id="Rfd84bcdcbf9444e4"/>
-    <p:sldId xmlns:r="http://schemas.openxmlformats.org/officeDocument/2006/relationships" id="260" r:id="Rd76cd4187c874487"/>
-    <p:sldId xmlns:r="http://schemas.openxmlformats.org/officeDocument/2006/relationships" id="261" r:id="R3fe8e581c2804912"/>
-    <p:sldId xmlns:r="http://schemas.openxmlformats.org/officeDocument/2006/relationships" id="262" r:id="R01a0d1a49b7e4f83"/>
-    <p:sldId xmlns:r="http://schemas.openxmlformats.org/officeDocument/2006/relationships" id="263" r:id="R6f57751b2eb745ea"/>
-    <p:sldId xmlns:r="http://schemas.openxmlformats.org/officeDocument/2006/relationships" id="264" r:id="Rb4635984710e48e6"/>
+    <p:sldId xmlns:r="http://schemas.openxmlformats.org/officeDocument/2006/relationships" id="256" r:id="Rd984f95b74694c6a"/>
+    <p:sldId xmlns:r="http://schemas.openxmlformats.org/officeDocument/2006/relationships" id="257" r:id="R2482fa5cf37d4101"/>
+    <p:sldId xmlns:r="http://schemas.openxmlformats.org/officeDocument/2006/relationships" id="258" r:id="R5afa2fc6705748f5"/>
+    <p:sldId xmlns:r="http://schemas.openxmlformats.org/officeDocument/2006/relationships" id="259" r:id="Ra3574670d9de428d"/>
+    <p:sldId xmlns:r="http://schemas.openxmlformats.org/officeDocument/2006/relationships" id="260" r:id="R33dc2125eaf04652"/>
+    <p:sldId xmlns:r="http://schemas.openxmlformats.org/officeDocument/2006/relationships" id="261" r:id="R1abcc35a576d4d10"/>
+    <p:sldId xmlns:r="http://schemas.openxmlformats.org/officeDocument/2006/relationships" id="262" r:id="Rf90df94271db49ac"/>
+    <p:sldId xmlns:r="http://schemas.openxmlformats.org/officeDocument/2006/relationships" id="263" r:id="R91baa4c66d3a494c"/>
+    <p:sldId xmlns:r="http://schemas.openxmlformats.org/officeDocument/2006/relationships" id="264" r:id="R4abc87d24af049e4"/>
   </p:sldIdLst>
   <p:sldSz cx="12192000" cy="6858000"/>
   <p:notesSz cx="6858000" cy="9144000"/>
@@ -208,14 +208,14 @@
     </a:clrScheme>
     <a:fontScheme name="Office">
       <a:majorFont>
-        <a:latin typeface="Calibri Light"/>
-        <a:ea typeface="Calibri Light"/>
-        <a:cs typeface="Calibri Light"/>
+        <a:latin typeface="Alibaba PuHuiTi"/>
+        <a:ea typeface="Alibaba PuHuiTi"/>
+        <a:cs typeface="Alibaba PuHuiTi"/>
       </a:majorFont>
       <a:minorFont>
-        <a:latin typeface="Calibri"/>
-        <a:ea typeface="Calibri"/>
-        <a:cs typeface="Calibri"/>
+        <a:latin typeface="Alibaba PuHuiTi"/>
+        <a:ea typeface="Alibaba PuHuiTi"/>
+        <a:cs typeface="Alibaba PuHuiTi"/>
       </a:minorFont>
     </a:fontScheme>
     <a:fmtScheme name="ChatGPT">
@@ -1343,7 +1343,7 @@
   </p:cSld>
   <p:clrMap bg1="lt1" tx1="dk1" bg2="lt2" tx2="dk2" accent1="accent1" accent2="accent2" accent3="accent3" accent4="accent4" accent5="accent5" accent6="accent6" hlink="hlink" folHlink="folHlink"/>
   <p:sldLayoutIdLst>
-    <p:sldLayoutId xmlns:r="http://schemas.openxmlformats.org/officeDocument/2006/relationships" id="2147483649" r:id="Rd0c703c2977e4288"/>
+    <p:sldLayoutId xmlns:r="http://schemas.openxmlformats.org/officeDocument/2006/relationships" id="2147483649" r:id="R73ad81221d904258"/>
   </p:sldLayoutIdLst>
   <p:txStyles>
     <p:titleStyle>
@@ -1359,9 +1359,9 @@
           <a:solidFill>
             <a:schemeClr val="tx1"/>
           </a:solidFill>
-          <a:latin typeface="+mj-lt"/>
-          <a:ea typeface="+mj-lt"/>
-          <a:cs typeface="+mj-lt"/>
+          <a:latin typeface="Alibaba PuHuiTi"/>
+          <a:ea typeface="Alibaba PuHuiTi"/>
+          <a:cs typeface="Alibaba PuHuiTi"/>
         </a:defRPr>
       </a:lvl1pPr>
     </p:titleStyle>
@@ -1378,9 +1378,9 @@
           <a:solidFill>
             <a:schemeClr val="tx1"/>
           </a:solidFill>
-          <a:latin typeface="+mn-lt"/>
-          <a:ea typeface="+mn-lt"/>
-          <a:cs typeface="+mn-lt"/>
+          <a:latin typeface="Alibaba PuHuiTi"/>
+          <a:ea typeface="Alibaba PuHuiTi"/>
+          <a:cs typeface="Alibaba PuHuiTi"/>
         </a:defRPr>
       </a:lvl1pPr>
       <a:lvl2pPr xmlns:a="http://schemas.openxmlformats.org/drawingml/2006/main" marL="685800" indent="-228600" algn="l">
@@ -1395,9 +1395,9 @@
           <a:solidFill>
             <a:schemeClr val="tx1"/>
           </a:solidFill>
-          <a:latin typeface="+mn-lt"/>
-          <a:ea typeface="+mn-lt"/>
-          <a:cs typeface="+mn-lt"/>
+          <a:latin typeface="Alibaba PuHuiTi"/>
+          <a:ea typeface="Alibaba PuHuiTi"/>
+          <a:cs typeface="Alibaba PuHuiTi"/>
         </a:defRPr>
       </a:lvl2pPr>
       <a:lvl3pPr xmlns:a="http://schemas.openxmlformats.org/drawingml/2006/main" marL="1143000" indent="-228600" algn="l">
@@ -1412,9 +1412,9 @@
           <a:solidFill>
             <a:schemeClr val="tx1"/>
           </a:solidFill>
-          <a:latin typeface="+mn-lt"/>
-          <a:ea typeface="+mn-lt"/>
-          <a:cs typeface="+mn-lt"/>
+          <a:latin typeface="Alibaba PuHuiTi"/>
+          <a:ea typeface="Alibaba PuHuiTi"/>
+          <a:cs typeface="Alibaba PuHuiTi"/>
         </a:defRPr>
       </a:lvl3pPr>
       <a:lvl4pPr xmlns:a="http://schemas.openxmlformats.org/drawingml/2006/main" marL="1600200" indent="-228600" algn="l">
@@ -1429,9 +1429,9 @@
           <a:solidFill>
             <a:schemeClr val="tx1"/>
           </a:solidFill>
-          <a:latin typeface="+mn-lt"/>
-          <a:ea typeface="+mn-lt"/>
-          <a:cs typeface="+mn-lt"/>
+          <a:latin typeface="Alibaba PuHuiTi"/>
+          <a:ea typeface="Alibaba PuHuiTi"/>
+          <a:cs typeface="Alibaba PuHuiTi"/>
         </a:defRPr>
       </a:lvl4pPr>
       <a:lvl5pPr xmlns:a="http://schemas.openxmlformats.org/drawingml/2006/main" marL="2057400" indent="-228600" algn="l">
@@ -1446,9 +1446,9 @@
           <a:solidFill>
             <a:schemeClr val="tx1"/>
           </a:solidFill>
-          <a:latin typeface="+mn-lt"/>
-          <a:ea typeface="+mn-lt"/>
-          <a:cs typeface="+mn-lt"/>
+          <a:latin typeface="Alibaba PuHuiTi"/>
+          <a:ea typeface="Alibaba PuHuiTi"/>
+          <a:cs typeface="Alibaba PuHuiTi"/>
         </a:defRPr>
       </a:lvl5pPr>
       <a:lvl6pPr xmlns:a="http://schemas.openxmlformats.org/drawingml/2006/main" marL="2514600" indent="-228600" algn="l">
@@ -1463,9 +1463,9 @@
           <a:solidFill>
             <a:schemeClr val="tx1"/>
           </a:solidFill>
-          <a:latin typeface="+mn-lt"/>
-          <a:ea typeface="+mn-lt"/>
-          <a:cs typeface="+mn-lt"/>
+          <a:latin typeface="Alibaba PuHuiTi"/>
+          <a:ea typeface="Alibaba PuHuiTi"/>
+          <a:cs typeface="Alibaba PuHuiTi"/>
         </a:defRPr>
       </a:lvl6pPr>
       <a:lvl7pPr xmlns:a="http://schemas.openxmlformats.org/drawingml/2006/main" marL="2971800" indent="-228600" algn="l">
@@ -1480,9 +1480,9 @@
           <a:solidFill>
             <a:schemeClr val="tx1"/>
           </a:solidFill>
-          <a:latin typeface="+mn-lt"/>
-          <a:ea typeface="+mn-lt"/>
-          <a:cs typeface="+mn-lt"/>
+          <a:latin typeface="Alibaba PuHuiTi"/>
+          <a:ea typeface="Alibaba PuHuiTi"/>
+          <a:cs typeface="Alibaba PuHuiTi"/>
         </a:defRPr>
       </a:lvl7pPr>
       <a:lvl8pPr xmlns:a="http://schemas.openxmlformats.org/drawingml/2006/main" marL="3429000" indent="-228600" algn="l">
@@ -1497,9 +1497,9 @@
           <a:solidFill>
             <a:schemeClr val="tx1"/>
           </a:solidFill>
-          <a:latin typeface="+mn-lt"/>
-          <a:ea typeface="+mn-lt"/>
-          <a:cs typeface="+mn-lt"/>
+          <a:latin typeface="Alibaba PuHuiTi"/>
+          <a:ea typeface="Alibaba PuHuiTi"/>
+          <a:cs typeface="Alibaba PuHuiTi"/>
         </a:defRPr>
       </a:lvl8pPr>
       <a:lvl9pPr xmlns:a="http://schemas.openxmlformats.org/drawingml/2006/main" marL="3886200" indent="-228600" algn="l">
@@ -1514,9 +1514,9 @@
           <a:solidFill>
             <a:schemeClr val="tx1"/>
           </a:solidFill>
-          <a:latin typeface="+mn-lt"/>
-          <a:ea typeface="+mn-lt"/>
-          <a:cs typeface="+mn-lt"/>
+          <a:latin typeface="Alibaba PuHuiTi"/>
+          <a:ea typeface="Alibaba PuHuiTi"/>
+          <a:cs typeface="Alibaba PuHuiTi"/>
         </a:defRPr>
       </a:lvl9pPr>
     </p:bodyStyle>
@@ -1527,9 +1527,9 @@
           <a:solidFill>
             <a:schemeClr val="tx1"/>
           </a:solidFill>
-          <a:latin typeface="+mn-lt"/>
-          <a:ea typeface="+mn-lt"/>
-          <a:cs typeface="+mn-lt"/>
+          <a:latin typeface="Alibaba PuHuiTi"/>
+          <a:ea typeface="Alibaba PuHuiTi"/>
+          <a:cs typeface="Alibaba PuHuiTi"/>
         </a:defRPr>
       </a:lvl1pPr>
       <a:lvl2pPr xmlns:a="http://schemas.openxmlformats.org/drawingml/2006/main" marL="457200" algn="l">
@@ -1538,9 +1538,9 @@
           <a:solidFill>
             <a:schemeClr val="tx1"/>
           </a:solidFill>
-          <a:latin typeface="+mn-lt"/>
-          <a:ea typeface="+mn-lt"/>
-          <a:cs typeface="+mn-lt"/>
+          <a:latin typeface="Alibaba PuHuiTi"/>
+          <a:ea typeface="Alibaba PuHuiTi"/>
+          <a:cs typeface="Alibaba PuHuiTi"/>
         </a:defRPr>
       </a:lvl2pPr>
       <a:lvl3pPr xmlns:a="http://schemas.openxmlformats.org/drawingml/2006/main" marL="914400" algn="l">
@@ -1549,9 +1549,9 @@
           <a:solidFill>
             <a:schemeClr val="tx1"/>
           </a:solidFill>
-          <a:latin typeface="+mn-lt"/>
-          <a:ea typeface="+mn-lt"/>
-          <a:cs typeface="+mn-lt"/>
+          <a:latin typeface="Alibaba PuHuiTi"/>
+          <a:ea typeface="Alibaba PuHuiTi"/>
+          <a:cs typeface="Alibaba PuHuiTi"/>
         </a:defRPr>
       </a:lvl3pPr>
       <a:lvl4pPr xmlns:a="http://schemas.openxmlformats.org/drawingml/2006/main" marL="1371600" algn="l">
@@ -1560,9 +1560,9 @@
           <a:solidFill>
             <a:schemeClr val="tx1"/>
           </a:solidFill>
-          <a:latin typeface="+mn-lt"/>
-          <a:ea typeface="+mn-lt"/>
-          <a:cs typeface="+mn-lt"/>
+          <a:latin typeface="Alibaba PuHuiTi"/>
+          <a:ea typeface="Alibaba PuHuiTi"/>
+          <a:cs typeface="Alibaba PuHuiTi"/>
         </a:defRPr>
       </a:lvl4pPr>
       <a:lvl5pPr xmlns:a="http://schemas.openxmlformats.org/drawingml/2006/main" marL="1828800" algn="l">
@@ -1571,9 +1571,9 @@
           <a:solidFill>
             <a:schemeClr val="tx1"/>
           </a:solidFill>
-          <a:latin typeface="+mn-lt"/>
-          <a:ea typeface="+mn-lt"/>
-          <a:cs typeface="+mn-lt"/>
+          <a:latin typeface="Alibaba PuHuiTi"/>
+          <a:ea typeface="Alibaba PuHuiTi"/>
+          <a:cs typeface="Alibaba PuHuiTi"/>
         </a:defRPr>
       </a:lvl5pPr>
       <a:lvl6pPr xmlns:a="http://schemas.openxmlformats.org/drawingml/2006/main" marL="2286000" algn="l">
@@ -1582,9 +1582,9 @@
           <a:solidFill>
             <a:schemeClr val="tx1"/>
           </a:solidFill>
-          <a:latin typeface="+mn-lt"/>
-          <a:ea typeface="+mn-lt"/>
-          <a:cs typeface="+mn-lt"/>
+          <a:latin typeface="Alibaba PuHuiTi"/>
+          <a:ea typeface="Alibaba PuHuiTi"/>
+          <a:cs typeface="Alibaba PuHuiTi"/>
         </a:defRPr>
       </a:lvl6pPr>
       <a:lvl7pPr xmlns:a="http://schemas.openxmlformats.org/drawingml/2006/main" marL="2743200" algn="l">
@@ -1593,9 +1593,9 @@
           <a:solidFill>
             <a:schemeClr val="tx1"/>
           </a:solidFill>
-          <a:latin typeface="+mn-lt"/>
-          <a:ea typeface="+mn-lt"/>
-          <a:cs typeface="+mn-lt"/>
+          <a:latin typeface="Alibaba PuHuiTi"/>
+          <a:ea typeface="Alibaba PuHuiTi"/>
+          <a:cs typeface="Alibaba PuHuiTi"/>
         </a:defRPr>
       </a:lvl7pPr>
       <a:lvl8pPr xmlns:a="http://schemas.openxmlformats.org/drawingml/2006/main" marL="3200400" algn="l">
@@ -1604,9 +1604,9 @@
           <a:solidFill>
             <a:schemeClr val="tx1"/>
           </a:solidFill>
-          <a:latin typeface="+mn-lt"/>
-          <a:ea typeface="+mn-lt"/>
-          <a:cs typeface="+mn-lt"/>
+          <a:latin typeface="Alibaba PuHuiTi"/>
+          <a:ea typeface="Alibaba PuHuiTi"/>
+          <a:cs typeface="Alibaba PuHuiTi"/>
         </a:defRPr>
       </a:lvl8pPr>
       <a:lvl9pPr xmlns:a="http://schemas.openxmlformats.org/drawingml/2006/main" marL="3657600" algn="l">
@@ -1615,9 +1615,9 @@
           <a:solidFill>
             <a:schemeClr val="tx1"/>
           </a:solidFill>
-          <a:latin typeface="+mn-lt"/>
-          <a:ea typeface="+mn-lt"/>
-          <a:cs typeface="+mn-lt"/>
+          <a:latin typeface="Alibaba PuHuiTi"/>
+          <a:ea typeface="Alibaba PuHuiTi"/>
+          <a:cs typeface="Alibaba PuHuiTi"/>
         </a:defRPr>
       </a:lvl9pPr>
     </p:otherStyle>
@@ -1668,14 +1668,14 @@
     </a:clrScheme>
     <a:fontScheme name="Office">
       <a:majorFont>
-        <a:latin typeface="Calibri Light"/>
-        <a:ea typeface="Calibri Light"/>
-        <a:cs typeface="Calibri Light"/>
+        <a:latin typeface="Alibaba PuHuiTi"/>
+        <a:ea typeface="Alibaba PuHuiTi"/>
+        <a:cs typeface="Alibaba PuHuiTi"/>
       </a:majorFont>
       <a:minorFont>
-        <a:latin typeface="Calibri"/>
-        <a:ea typeface="Calibri"/>
-        <a:cs typeface="Calibri"/>
+        <a:latin typeface="Alibaba PuHuiTi"/>
+        <a:ea typeface="Alibaba PuHuiTi"/>
+        <a:cs typeface="Alibaba PuHuiTi"/>
       </a:minorFont>
     </a:fontScheme>
     <a:fmtScheme name="ChatGPT">
@@ -1920,9 +1920,9 @@
                 <a:solidFill>
                   <a:srgbClr val="000000"/>
                 </a:solidFill>
-                <a:latin typeface="Helvetica Neue"/>
-                <a:ea typeface="Helvetica Neue"/>
-                <a:cs typeface="Helvetica Neue"/>
+                <a:latin typeface="Alibaba PuHuiTi"/>
+                <a:ea typeface="Alibaba PuHuiTi"/>
+                <a:cs typeface="Alibaba PuHuiTi"/>
               </a:defRPr>
             </a:pPr>
             <a:r>
@@ -1930,9 +1930,9 @@
                 <a:solidFill>
                   <a:srgbClr val="111318"/>
                 </a:solidFill>
-                <a:latin typeface="PingFang SC"/>
-                <a:ea typeface="PingFang SC"/>
-                <a:cs typeface="PingFang SC"/>
+                <a:latin typeface="Alibaba PuHuiTi"/>
+                <a:ea typeface="Alibaba PuHuiTi"/>
+                <a:cs typeface="Alibaba PuHuiTi"/>
               </a:rPr>
               <a:t>当 README
 开始被 agent 执行</a:t>
@@ -1978,9 +1978,9 @@
                 <a:solidFill>
                   <a:srgbClr val="000000"/>
                 </a:solidFill>
-                <a:latin typeface="Helvetica Neue"/>
-                <a:ea typeface="Helvetica Neue"/>
-                <a:cs typeface="Helvetica Neue"/>
+                <a:latin typeface="Alibaba PuHuiTi"/>
+                <a:ea typeface="Alibaba PuHuiTi"/>
+                <a:cs typeface="Alibaba PuHuiTi"/>
               </a:defRPr>
             </a:pPr>
             <a:r>
@@ -1988,9 +1988,9 @@
                 <a:solidFill>
                   <a:srgbClr val="565D68"/>
                 </a:solidFill>
-                <a:latin typeface="PingFang SC"/>
-                <a:ea typeface="PingFang SC"/>
-                <a:cs typeface="PingFang SC"/>
+                <a:latin typeface="Alibaba PuHuiTi"/>
+                <a:ea typeface="Alibaba PuHuiTi"/>
+                <a:cs typeface="Alibaba PuHuiTi"/>
               </a:rPr>
               <a:t>Awesome × Agentic AI Landscape 2026
 460 repositories scanned</a:t>
@@ -2036,9 +2036,9 @@
                 <a:solidFill>
                   <a:srgbClr val="000000"/>
                 </a:solidFill>
-                <a:latin typeface="Helvetica Neue"/>
-                <a:ea typeface="Helvetica Neue"/>
-                <a:cs typeface="Helvetica Neue"/>
+                <a:latin typeface="Alibaba PuHuiTi"/>
+                <a:ea typeface="Alibaba PuHuiTi"/>
+                <a:cs typeface="Alibaba PuHuiTi"/>
               </a:defRPr>
             </a:pPr>
             <a:r>
@@ -2046,9 +2046,9 @@
                 <a:solidFill>
                   <a:srgbClr val="3D8DFF"/>
                 </a:solidFill>
-                <a:latin typeface="PingFang SC"/>
-                <a:ea typeface="PingFang SC"/>
-                <a:cs typeface="PingFang SC"/>
+                <a:latin typeface="Alibaba PuHuiTi"/>
+                <a:ea typeface="Alibaba PuHuiTi"/>
+                <a:cs typeface="Alibaba PuHuiTi"/>
               </a:rPr>
               <a:t>OPEN-SOURCE SIGNALS / JULY 2026</a:t>
             </a:r>
@@ -2148,9 +2148,9 @@
                 <a:solidFill>
                   <a:srgbClr val="000000"/>
                 </a:solidFill>
-                <a:latin typeface="Helvetica Neue"/>
-                <a:ea typeface="Helvetica Neue"/>
-                <a:cs typeface="Helvetica Neue"/>
+                <a:latin typeface="Alibaba PuHuiTi"/>
+                <a:ea typeface="Alibaba PuHuiTi"/>
+                <a:cs typeface="Alibaba PuHuiTi"/>
               </a:defRPr>
             </a:pPr>
             <a:r>
@@ -2158,9 +2158,9 @@
                 <a:solidFill>
                   <a:srgbClr val="565D68"/>
                 </a:solidFill>
-                <a:latin typeface="PingFang SC"/>
-                <a:ea typeface="PingFang SC"/>
-                <a:cs typeface="PingFang SC"/>
+                <a:latin typeface="Alibaba PuHuiTi"/>
+                <a:ea typeface="Alibaba PuHuiTi"/>
+                <a:cs typeface="Alibaba PuHuiTi"/>
               </a:rPr>
               <a:t>2</a:t>
             </a:r>
@@ -2205,9 +2205,9 @@
                 <a:solidFill>
                   <a:srgbClr val="000000"/>
                 </a:solidFill>
-                <a:latin typeface="Helvetica Neue"/>
-                <a:ea typeface="Helvetica Neue"/>
-                <a:cs typeface="Helvetica Neue"/>
+                <a:latin typeface="Alibaba PuHuiTi"/>
+                <a:ea typeface="Alibaba PuHuiTi"/>
+                <a:cs typeface="Alibaba PuHuiTi"/>
               </a:defRPr>
             </a:pPr>
             <a:r>
@@ -2215,9 +2215,9 @@
                 <a:solidFill>
                   <a:srgbClr val="111318"/>
                 </a:solidFill>
-                <a:latin typeface="PingFang SC"/>
-                <a:ea typeface="PingFang SC"/>
-                <a:cs typeface="PingFang SC"/>
+                <a:latin typeface="Alibaba PuHuiTi"/>
+                <a:ea typeface="Alibaba PuHuiTi"/>
+                <a:cs typeface="Alibaba PuHuiTi"/>
               </a:rPr>
               <a:t>这张图画的，是知识靠近 agent 的方式</a:t>
             </a:r>
@@ -2289,13 +2289,14 @@
           <a:lstStyle xmlns:a="http://schemas.openxmlformats.org/drawingml/2006/main"/>
           <a:p xmlns:a="http://schemas.openxmlformats.org/drawingml/2006/main">
             <a:pPr algn="l">
+              <a:buNone/>
               <a:defRPr sz="2400">
                 <a:solidFill>
                   <a:srgbClr val="000000"/>
                 </a:solidFill>
-                <a:latin typeface="Helvetica Neue"/>
-                <a:ea typeface="Helvetica Neue"/>
-                <a:cs typeface="Helvetica Neue"/>
+                <a:latin typeface="Alibaba PuHuiTi"/>
+                <a:ea typeface="Alibaba PuHuiTi"/>
+                <a:cs typeface="Alibaba PuHuiTi"/>
               </a:defRPr>
             </a:pPr>
             <a:r>
@@ -2304,13 +2305,14 @@
           </a:p>
           <a:p xmlns:a="http://schemas.openxmlformats.org/drawingml/2006/main">
             <a:pPr algn="l">
+              <a:buNone/>
               <a:defRPr sz="2400">
                 <a:solidFill>
                   <a:srgbClr val="000000"/>
                 </a:solidFill>
-                <a:latin typeface="Helvetica Neue"/>
-                <a:ea typeface="Helvetica Neue"/>
-                <a:cs typeface="Helvetica Neue"/>
+                <a:latin typeface="Alibaba PuHuiTi"/>
+                <a:ea typeface="Alibaba PuHuiTi"/>
+                <a:cs typeface="Alibaba PuHuiTi"/>
               </a:defRPr>
             </a:pPr>
             <a:r>
@@ -2321,14 +2323,14 @@
       </p:sp>
       <p:pic>
         <p:nvPicPr>
-          <p:cNvPr id="13" name=""/>
+          <p:cNvPr id="15" name=""/>
           <p:cNvPicPr>
             <a:picLocks xmlns:a="http://schemas.openxmlformats.org/drawingml/2006/main" noChangeAspect="1"/>
           </p:cNvPicPr>
           <p:nvPr/>
         </p:nvPicPr>
         <p:blipFill>
-          <a:blip xmlns:r="http://schemas.openxmlformats.org/officeDocument/2006/relationships" xmlns:a="http://schemas.openxmlformats.org/drawingml/2006/main" r:embed="Rbe832172f91b4f05"/>
+          <a:blip xmlns:r="http://schemas.openxmlformats.org/officeDocument/2006/relationships" xmlns:a="http://schemas.openxmlformats.org/drawingml/2006/main" r:embed="R8961fb5cd968422a"/>
           <a:srcRect xmlns:a="http://schemas.openxmlformats.org/drawingml/2006/main" l="0" t="11120" r="0" b="11120"/>
           <a:stretch xmlns:a="http://schemas.openxmlformats.org/drawingml/2006/main">
             <a:fillRect l="0" t="0" r="0" b="0"/>
@@ -2410,13 +2412,14 @@
           <a:lstStyle xmlns:a="http://schemas.openxmlformats.org/drawingml/2006/main"/>
           <a:p xmlns:a="http://schemas.openxmlformats.org/drawingml/2006/main">
             <a:pPr algn="l">
+              <a:buNone/>
               <a:defRPr sz="2925" b="1">
                 <a:solidFill>
                   <a:srgbClr val="111318"/>
                 </a:solidFill>
-                <a:latin typeface="PingFang SC"/>
-                <a:ea typeface="PingFang SC"/>
-                <a:cs typeface="PingFang SC"/>
+                <a:latin typeface="Alibaba PuHuiTi"/>
+                <a:ea typeface="Alibaba PuHuiTi"/>
+                <a:cs typeface="Alibaba PuHuiTi"/>
               </a:defRPr>
             </a:pPr>
             <a:r>
@@ -2424,9 +2427,9 @@
                 <a:solidFill>
                   <a:srgbClr val="111318"/>
                 </a:solidFill>
-                <a:latin typeface="PingFang SC"/>
-                <a:ea typeface="PingFang SC"/>
-                <a:cs typeface="PingFang SC"/>
+                <a:latin typeface="Alibaba PuHuiTi"/>
+                <a:ea typeface="Alibaba PuHuiTi"/>
+                <a:cs typeface="Alibaba PuHuiTi"/>
               </a:rPr>
               <a:t>这张图画的，是知识靠近 agent 的方式</a:t>
             </a:r>
@@ -2578,9 +2581,9 @@
                 <a:solidFill>
                   <a:srgbClr val="000000"/>
                 </a:solidFill>
-                <a:latin typeface="Helvetica Neue"/>
-                <a:ea typeface="Helvetica Neue"/>
-                <a:cs typeface="Helvetica Neue"/>
+                <a:latin typeface="Alibaba PuHuiTi"/>
+                <a:ea typeface="Alibaba PuHuiTi"/>
+                <a:cs typeface="Alibaba PuHuiTi"/>
               </a:defRPr>
             </a:pPr>
             <a:r>
@@ -2588,9 +2591,9 @@
                 <a:solidFill>
                   <a:srgbClr val="565D68"/>
                 </a:solidFill>
-                <a:latin typeface="PingFang SC"/>
-                <a:ea typeface="PingFang SC"/>
-                <a:cs typeface="PingFang SC"/>
+                <a:latin typeface="Alibaba PuHuiTi"/>
+                <a:ea typeface="Alibaba PuHuiTi"/>
+                <a:cs typeface="Alibaba PuHuiTi"/>
               </a:rPr>
               <a:t>3</a:t>
             </a:r>
@@ -2635,9 +2638,9 @@
                 <a:solidFill>
                   <a:srgbClr val="000000"/>
                 </a:solidFill>
-                <a:latin typeface="Helvetica Neue"/>
-                <a:ea typeface="Helvetica Neue"/>
-                <a:cs typeface="Helvetica Neue"/>
+                <a:latin typeface="Alibaba PuHuiTi"/>
+                <a:ea typeface="Alibaba PuHuiTi"/>
+                <a:cs typeface="Alibaba PuHuiTi"/>
               </a:defRPr>
             </a:pPr>
             <a:r>
@@ -2645,9 +2648,9 @@
                 <a:solidFill>
                   <a:srgbClr val="111318"/>
                 </a:solidFill>
-                <a:latin typeface="PingFang SC"/>
-                <a:ea typeface="PingFang SC"/>
-                <a:cs typeface="PingFang SC"/>
+                <a:latin typeface="Alibaba PuHuiTi"/>
+                <a:ea typeface="Alibaba PuHuiTi"/>
+                <a:cs typeface="Alibaba PuHuiTi"/>
               </a:rPr>
               <a:t>真正有故事的项目，大多已经靠近 agent 运行时</a:t>
             </a:r>
@@ -2692,9 +2695,9 @@
                 <a:solidFill>
                   <a:srgbClr val="000000"/>
                 </a:solidFill>
-                <a:latin typeface="Helvetica Neue"/>
-                <a:ea typeface="Helvetica Neue"/>
-                <a:cs typeface="Helvetica Neue"/>
+                <a:latin typeface="Alibaba PuHuiTi"/>
+                <a:ea typeface="Alibaba PuHuiTi"/>
+                <a:cs typeface="Alibaba PuHuiTi"/>
               </a:defRPr>
             </a:pPr>
             <a:r>
@@ -2702,9 +2705,9 @@
                 <a:solidFill>
                   <a:srgbClr val="565D68"/>
                 </a:solidFill>
-                <a:latin typeface="PingFang SC"/>
-                <a:ea typeface="PingFang SC"/>
-                <a:cs typeface="PingFang SC"/>
+                <a:latin typeface="Alibaba PuHuiTi"/>
+                <a:ea typeface="Alibaba PuHuiTi"/>
+                <a:cs typeface="Alibaba PuHuiTi"/>
               </a:rPr>
               <a:t>进入首轮 landscape
 另有 2 个历史参照</a:t>
@@ -2750,9 +2753,9 @@
                 <a:solidFill>
                   <a:srgbClr val="000000"/>
                 </a:solidFill>
-                <a:latin typeface="Helvetica Neue"/>
-                <a:ea typeface="Helvetica Neue"/>
-                <a:cs typeface="Helvetica Neue"/>
+                <a:latin typeface="Alibaba PuHuiTi"/>
+                <a:ea typeface="Alibaba PuHuiTi"/>
+                <a:cs typeface="Alibaba PuHuiTi"/>
               </a:defRPr>
             </a:pPr>
             <a:r>
@@ -2760,9 +2763,9 @@
                 <a:solidFill>
                   <a:srgbClr val="565D68"/>
                 </a:solidFill>
-                <a:latin typeface="PingFang SC"/>
-                <a:ea typeface="PingFang SC"/>
-                <a:cs typeface="PingFang SC"/>
+                <a:latin typeface="Alibaba PuHuiTi"/>
+                <a:ea typeface="Alibaba PuHuiTi"/>
+                <a:cs typeface="Alibaba PuHuiTi"/>
               </a:rPr>
               <a:t>创建于 2025 年以后
 约 92%</a:t>
@@ -2808,9 +2811,9 @@
                 <a:solidFill>
                   <a:srgbClr val="000000"/>
                 </a:solidFill>
-                <a:latin typeface="Helvetica Neue"/>
-                <a:ea typeface="Helvetica Neue"/>
-                <a:cs typeface="Helvetica Neue"/>
+                <a:latin typeface="Alibaba PuHuiTi"/>
+                <a:ea typeface="Alibaba PuHuiTi"/>
+                <a:cs typeface="Alibaba PuHuiTi"/>
               </a:defRPr>
             </a:pPr>
             <a:r>
@@ -2818,9 +2821,9 @@
                 <a:solidFill>
                   <a:srgbClr val="565D68"/>
                 </a:solidFill>
-                <a:latin typeface="PingFang SC"/>
-                <a:ea typeface="PingFang SC"/>
-                <a:cs typeface="PingFang SC"/>
+                <a:latin typeface="Alibaba PuHuiTi"/>
+                <a:ea typeface="Alibaba PuHuiTi"/>
+                <a:cs typeface="Alibaba PuHuiTi"/>
               </a:rPr>
               <a:t>可直接交给 agent
 约 79%</a:t>
@@ -2866,9 +2869,9 @@
                 <a:solidFill>
                   <a:srgbClr val="000000"/>
                 </a:solidFill>
-                <a:latin typeface="Helvetica Neue"/>
-                <a:ea typeface="Helvetica Neue"/>
-                <a:cs typeface="Helvetica Neue"/>
+                <a:latin typeface="Alibaba PuHuiTi"/>
+                <a:ea typeface="Alibaba PuHuiTi"/>
+                <a:cs typeface="Alibaba PuHuiTi"/>
               </a:defRPr>
             </a:pPr>
             <a:r>
@@ -2876,9 +2879,9 @@
                 <a:solidFill>
                   <a:srgbClr val="111318"/>
                 </a:solidFill>
-                <a:latin typeface="PingFang SC"/>
-                <a:ea typeface="PingFang SC"/>
-                <a:cs typeface="PingFang SC"/>
+                <a:latin typeface="Alibaba PuHuiTi"/>
+                <a:ea typeface="Alibaba PuHuiTi"/>
+                <a:cs typeface="Alibaba PuHuiTi"/>
               </a:rPr>
               <a:t>24</a:t>
             </a:r>
@@ -2923,9 +2926,9 @@
                 <a:solidFill>
                   <a:srgbClr val="000000"/>
                 </a:solidFill>
-                <a:latin typeface="Helvetica Neue"/>
-                <a:ea typeface="Helvetica Neue"/>
-                <a:cs typeface="Helvetica Neue"/>
+                <a:latin typeface="Alibaba PuHuiTi"/>
+                <a:ea typeface="Alibaba PuHuiTi"/>
+                <a:cs typeface="Alibaba PuHuiTi"/>
               </a:defRPr>
             </a:pPr>
             <a:r>
@@ -2933,9 +2936,9 @@
                 <a:solidFill>
                   <a:srgbClr val="3D8DFF"/>
                 </a:solidFill>
-                <a:latin typeface="PingFang SC"/>
-                <a:ea typeface="PingFang SC"/>
-                <a:cs typeface="PingFang SC"/>
+                <a:latin typeface="Alibaba PuHuiTi"/>
+                <a:ea typeface="Alibaba PuHuiTi"/>
+                <a:cs typeface="Alibaba PuHuiTi"/>
               </a:rPr>
               <a:t>19 / 24</a:t>
             </a:r>
@@ -2980,9 +2983,9 @@
                 <a:solidFill>
                   <a:srgbClr val="000000"/>
                 </a:solidFill>
-                <a:latin typeface="Helvetica Neue"/>
-                <a:ea typeface="Helvetica Neue"/>
-                <a:cs typeface="Helvetica Neue"/>
+                <a:latin typeface="Alibaba PuHuiTi"/>
+                <a:ea typeface="Alibaba PuHuiTi"/>
+                <a:cs typeface="Alibaba PuHuiTi"/>
               </a:defRPr>
             </a:pPr>
             <a:r>
@@ -2990,9 +2993,9 @@
                 <a:solidFill>
                   <a:srgbClr val="111318"/>
                 </a:solidFill>
-                <a:latin typeface="PingFang SC"/>
-                <a:ea typeface="PingFang SC"/>
-                <a:cs typeface="PingFang SC"/>
+                <a:latin typeface="Alibaba PuHuiTi"/>
+                <a:ea typeface="Alibaba PuHuiTi"/>
+                <a:cs typeface="Alibaba PuHuiTi"/>
               </a:rPr>
               <a:t>22 / 24</a:t>
             </a:r>
@@ -3037,9 +3040,9 @@
                 <a:solidFill>
                   <a:srgbClr val="000000"/>
                 </a:solidFill>
-                <a:latin typeface="Helvetica Neue"/>
-                <a:ea typeface="Helvetica Neue"/>
-                <a:cs typeface="Helvetica Neue"/>
+                <a:latin typeface="Alibaba PuHuiTi"/>
+                <a:ea typeface="Alibaba PuHuiTi"/>
+                <a:cs typeface="Alibaba PuHuiTi"/>
               </a:defRPr>
             </a:pPr>
             <a:r>
@@ -3047,9 +3050,9 @@
                 <a:solidFill>
                   <a:srgbClr val="111318"/>
                 </a:solidFill>
-                <a:latin typeface="PingFang SC"/>
-                <a:ea typeface="PingFang SC"/>
-                <a:cs typeface="PingFang SC"/>
+                <a:latin typeface="Alibaba PuHuiTi"/>
+                <a:ea typeface="Alibaba PuHuiTi"/>
+                <a:cs typeface="Alibaba PuHuiTi"/>
               </a:rPr>
               <a:t>这是一份编辑样本，不是市场份额统计。它说明我们在 460 个候选里看到了什么。</a:t>
             </a:r>
@@ -3064,9 +3067,9 @@
                 <a:solidFill>
                   <a:srgbClr val="000000"/>
                 </a:solidFill>
-                <a:latin typeface="Helvetica Neue"/>
-                <a:ea typeface="Helvetica Neue"/>
-                <a:cs typeface="Helvetica Neue"/>
+                <a:latin typeface="Alibaba PuHuiTi"/>
+                <a:ea typeface="Alibaba PuHuiTi"/>
+                <a:cs typeface="Alibaba PuHuiTi"/>
               </a:defRPr>
             </a:pPr>
             <a:r>
@@ -3074,9 +3077,9 @@
                 <a:solidFill>
                   <a:srgbClr val="565D68"/>
                 </a:solidFill>
-                <a:latin typeface="PingFang SC"/>
-                <a:ea typeface="PingFang SC"/>
-                <a:cs typeface="PingFang SC"/>
+                <a:latin typeface="Alibaba PuHuiTi"/>
+                <a:ea typeface="Alibaba PuHuiTi"/>
+                <a:cs typeface="Alibaba PuHuiTi"/>
               </a:rPr>
               <a:t>近三个月的活动信号负责发现项目；最终入选还要看内容能否被 agent 直接消费，以及它是否代表一种新的策展形态。</a:t>
             </a:r>
@@ -3149,13 +3152,14 @@
           <a:lstStyle xmlns:a="http://schemas.openxmlformats.org/drawingml/2006/main"/>
           <a:p xmlns:a="http://schemas.openxmlformats.org/drawingml/2006/main">
             <a:pPr algn="l">
+              <a:buNone/>
               <a:defRPr sz="900" b="0">
                 <a:solidFill>
                   <a:srgbClr val="565D68"/>
                 </a:solidFill>
-                <a:latin typeface="PingFang SC"/>
-                <a:ea typeface="PingFang SC"/>
-                <a:cs typeface="PingFang SC"/>
+                <a:latin typeface="Alibaba PuHuiTi"/>
+                <a:ea typeface="Alibaba PuHuiTi"/>
+                <a:cs typeface="Alibaba PuHuiTi"/>
               </a:defRPr>
             </a:pPr>
             <a:r>
@@ -3163,9 +3167,9 @@
                 <a:solidFill>
                   <a:srgbClr val="565D68"/>
                 </a:solidFill>
-                <a:latin typeface="PingFang SC"/>
-                <a:ea typeface="PingFang SC"/>
-                <a:cs typeface="PingFang SC"/>
+                <a:latin typeface="Alibaba PuHuiTi"/>
+                <a:ea typeface="Alibaba PuHuiTi"/>
+                <a:cs typeface="Alibaba PuHuiTi"/>
               </a:rPr>
               <a:t>Snapshot 2026-07-29 · WatchEvents/participants: May 1–Jul 28 · OpenRank: Apr–Jun 2026</a:t>
             </a:r>
@@ -3230,9 +3234,9 @@
                 <a:solidFill>
                   <a:srgbClr val="000000"/>
                 </a:solidFill>
-                <a:latin typeface="Helvetica Neue"/>
-                <a:ea typeface="Helvetica Neue"/>
-                <a:cs typeface="Helvetica Neue"/>
+                <a:latin typeface="Alibaba PuHuiTi"/>
+                <a:ea typeface="Alibaba PuHuiTi"/>
+                <a:cs typeface="Alibaba PuHuiTi"/>
               </a:defRPr>
             </a:pPr>
             <a:r>
@@ -3240,9 +3244,9 @@
                 <a:solidFill>
                   <a:srgbClr val="565D68"/>
                 </a:solidFill>
-                <a:latin typeface="PingFang SC"/>
-                <a:ea typeface="PingFang SC"/>
-                <a:cs typeface="PingFang SC"/>
+                <a:latin typeface="Alibaba PuHuiTi"/>
+                <a:ea typeface="Alibaba PuHuiTi"/>
+                <a:cs typeface="Alibaba PuHuiTi"/>
               </a:rPr>
               <a:t>4</a:t>
             </a:r>
@@ -3287,9 +3291,9 @@
                 <a:solidFill>
                   <a:srgbClr val="000000"/>
                 </a:solidFill>
-                <a:latin typeface="Helvetica Neue"/>
-                <a:ea typeface="Helvetica Neue"/>
-                <a:cs typeface="Helvetica Neue"/>
+                <a:latin typeface="Alibaba PuHuiTi"/>
+                <a:ea typeface="Alibaba PuHuiTi"/>
+                <a:cs typeface="Alibaba PuHuiTi"/>
               </a:defRPr>
             </a:pPr>
             <a:r>
@@ -3297,9 +3301,9 @@
                 <a:solidFill>
                   <a:srgbClr val="111318"/>
                 </a:solidFill>
-                <a:latin typeface="PingFang SC"/>
-                <a:ea typeface="PingFang SC"/>
-                <a:cs typeface="PingFang SC"/>
+                <a:latin typeface="Alibaba PuHuiTi"/>
+                <a:ea typeface="Alibaba PuHuiTi"/>
+                <a:cs typeface="Alibaba PuHuiTi"/>
               </a:rPr>
               <a:t>“Awesome”正在长出四种消费方式</a:t>
             </a:r>
@@ -3342,9 +3346,9 @@
                 <a:solidFill>
                   <a:srgbClr val="000000"/>
                 </a:solidFill>
-                <a:latin typeface="Helvetica Neue"/>
-                <a:ea typeface="Helvetica Neue"/>
-                <a:cs typeface="Helvetica Neue"/>
+                <a:latin typeface="Alibaba PuHuiTi"/>
+                <a:ea typeface="Alibaba PuHuiTi"/>
+                <a:cs typeface="Alibaba PuHuiTi"/>
               </a:defRPr>
             </a:pPr>
             <a:r>
@@ -3352,9 +3356,9 @@
                 <a:solidFill>
                   <a:srgbClr val="8A245F"/>
                 </a:solidFill>
-                <a:latin typeface="PingFang SC"/>
-                <a:ea typeface="PingFang SC"/>
-                <a:cs typeface="PingFang SC"/>
+                <a:latin typeface="Alibaba PuHuiTi"/>
+                <a:ea typeface="Alibaba PuHuiTi"/>
+                <a:cs typeface="Alibaba PuHuiTi"/>
               </a:rPr>
               <a:t>01  DISCOVER</a:t>
             </a:r>
@@ -3369,9 +3373,9 @@
                 <a:solidFill>
                   <a:srgbClr val="000000"/>
                 </a:solidFill>
-                <a:latin typeface="Helvetica Neue"/>
-                <a:ea typeface="Helvetica Neue"/>
-                <a:cs typeface="Helvetica Neue"/>
+                <a:latin typeface="Alibaba PuHuiTi"/>
+                <a:ea typeface="Alibaba PuHuiTi"/>
+                <a:cs typeface="Alibaba PuHuiTi"/>
               </a:defRPr>
             </a:pPr>
             <a:r>
@@ -3379,9 +3383,9 @@
                 <a:solidFill>
                   <a:srgbClr val="565D68"/>
                 </a:solidFill>
-                <a:latin typeface="PingFang SC"/>
-                <a:ea typeface="PingFang SC"/>
-                <a:cs typeface="PingFang SC"/>
+                <a:latin typeface="Alibaba PuHuiTi"/>
+                <a:ea typeface="Alibaba PuHuiTi"/>
+                <a:cs typeface="Alibaba PuHuiTi"/>
               </a:rPr>
               <a:t>人来阅读、浏览、比较。
 代表：经典 awesome 列表、生态地图。</a:t>
@@ -3425,9 +3429,9 @@
                 <a:solidFill>
                   <a:srgbClr val="000000"/>
                 </a:solidFill>
-                <a:latin typeface="Helvetica Neue"/>
-                <a:ea typeface="Helvetica Neue"/>
-                <a:cs typeface="Helvetica Neue"/>
+                <a:latin typeface="Alibaba PuHuiTi"/>
+                <a:ea typeface="Alibaba PuHuiTi"/>
+                <a:cs typeface="Alibaba PuHuiTi"/>
               </a:defRPr>
             </a:pPr>
             <a:r>
@@ -3435,9 +3439,9 @@
                 <a:solidFill>
                   <a:srgbClr val="70408C"/>
                 </a:solidFill>
-                <a:latin typeface="PingFang SC"/>
-                <a:ea typeface="PingFang SC"/>
-                <a:cs typeface="PingFang SC"/>
+                <a:latin typeface="Alibaba PuHuiTi"/>
+                <a:ea typeface="Alibaba PuHuiTi"/>
+                <a:cs typeface="Alibaba PuHuiTi"/>
               </a:rPr>
               <a:t>02  REUSE</a:t>
             </a:r>
@@ -3452,9 +3456,9 @@
                 <a:solidFill>
                   <a:srgbClr val="000000"/>
                 </a:solidFill>
-                <a:latin typeface="Helvetica Neue"/>
-                <a:ea typeface="Helvetica Neue"/>
-                <a:cs typeface="Helvetica Neue"/>
+                <a:latin typeface="Alibaba PuHuiTi"/>
+                <a:ea typeface="Alibaba PuHuiTi"/>
+                <a:cs typeface="Alibaba PuHuiTi"/>
               </a:defRPr>
             </a:pPr>
             <a:r>
@@ -3462,9 +3466,9 @@
                 <a:solidFill>
                   <a:srgbClr val="565D68"/>
                 </a:solidFill>
-                <a:latin typeface="PingFang SC"/>
-                <a:ea typeface="PingFang SC"/>
-                <a:cs typeface="PingFang SC"/>
+                <a:latin typeface="Alibaba PuHuiTi"/>
+                <a:ea typeface="Alibaba PuHuiTi"/>
+                <a:cs typeface="Alibaba PuHuiTi"/>
               </a:rPr>
               <a:t>复制一份资产，再让 agent 使用。
 代表：prompt、DESIGN.md、工作流模板。</a:t>
@@ -3510,9 +3514,9 @@
                 <a:solidFill>
                   <a:srgbClr val="000000"/>
                 </a:solidFill>
-                <a:latin typeface="Helvetica Neue"/>
-                <a:ea typeface="Helvetica Neue"/>
-                <a:cs typeface="Helvetica Neue"/>
+                <a:latin typeface="Alibaba PuHuiTi"/>
+                <a:ea typeface="Alibaba PuHuiTi"/>
+                <a:cs typeface="Alibaba PuHuiTi"/>
               </a:defRPr>
             </a:pPr>
             <a:r>
@@ -3520,9 +3524,9 @@
                 <a:solidFill>
                   <a:srgbClr val="285D9E"/>
                 </a:solidFill>
-                <a:latin typeface="PingFang SC"/>
-                <a:ea typeface="PingFang SC"/>
-                <a:cs typeface="PingFang SC"/>
+                <a:latin typeface="Alibaba PuHuiTi"/>
+                <a:ea typeface="Alibaba PuHuiTi"/>
+                <a:cs typeface="Alibaba PuHuiTi"/>
               </a:rPr>
               <a:t>03  INSTALL</a:t>
             </a:r>
@@ -3537,9 +3541,9 @@
                 <a:solidFill>
                   <a:srgbClr val="000000"/>
                 </a:solidFill>
-                <a:latin typeface="Helvetica Neue"/>
-                <a:ea typeface="Helvetica Neue"/>
-                <a:cs typeface="Helvetica Neue"/>
+                <a:latin typeface="Alibaba PuHuiTi"/>
+                <a:ea typeface="Alibaba PuHuiTi"/>
+                <a:cs typeface="Alibaba PuHuiTi"/>
               </a:defRPr>
             </a:pPr>
             <a:r>
@@ -3547,9 +3551,9 @@
                 <a:solidFill>
                   <a:srgbClr val="565D68"/>
                 </a:solidFill>
-                <a:latin typeface="PingFang SC"/>
-                <a:ea typeface="PingFang SC"/>
-                <a:cs typeface="PingFang SC"/>
+                <a:latin typeface="Alibaba PuHuiTi"/>
+                <a:ea typeface="Alibaba PuHuiTi"/>
+                <a:cs typeface="Alibaba PuHuiTi"/>
               </a:rPr>
               <a:t>目录带有解析和安装语义。
 代表：skills、plugins、跨 agent catalog。</a:t>
@@ -3595,9 +3599,9 @@
                 <a:solidFill>
                   <a:srgbClr val="000000"/>
                 </a:solidFill>
-                <a:latin typeface="Helvetica Neue"/>
-                <a:ea typeface="Helvetica Neue"/>
-                <a:cs typeface="Helvetica Neue"/>
+                <a:latin typeface="Alibaba PuHuiTi"/>
+                <a:ea typeface="Alibaba PuHuiTi"/>
+                <a:cs typeface="Alibaba PuHuiTi"/>
               </a:defRPr>
             </a:pPr>
             <a:r>
@@ -3605,9 +3609,9 @@
                 <a:solidFill>
                   <a:srgbClr val="257653"/>
                 </a:solidFill>
-                <a:latin typeface="PingFang SC"/>
-                <a:ea typeface="PingFang SC"/>
-                <a:cs typeface="PingFang SC"/>
+                <a:latin typeface="Alibaba PuHuiTi"/>
+                <a:ea typeface="Alibaba PuHuiTi"/>
+                <a:cs typeface="Alibaba PuHuiTi"/>
               </a:rPr>
               <a:t>04  OPERATE</a:t>
             </a:r>
@@ -3622,9 +3626,9 @@
                 <a:solidFill>
                   <a:srgbClr val="000000"/>
                 </a:solidFill>
-                <a:latin typeface="Helvetica Neue"/>
-                <a:ea typeface="Helvetica Neue"/>
-                <a:cs typeface="Helvetica Neue"/>
+                <a:latin typeface="Alibaba PuHuiTi"/>
+                <a:ea typeface="Alibaba PuHuiTi"/>
+                <a:cs typeface="Alibaba PuHuiTi"/>
               </a:defRPr>
             </a:pPr>
             <a:r>
@@ -3632,9 +3636,9 @@
                 <a:solidFill>
                   <a:srgbClr val="565D68"/>
                 </a:solidFill>
-                <a:latin typeface="PingFang SC"/>
-                <a:ea typeface="PingFang SC"/>
-                <a:cs typeface="PingFang SC"/>
+                <a:latin typeface="Alibaba PuHuiTi"/>
+                <a:ea typeface="Alibaba PuHuiTi"/>
+                <a:cs typeface="Alibaba PuHuiTi"/>
               </a:rPr>
               <a:t>内容开始规定 agent 如何计划、评审和收尾。
 代表：spec、TDD、角色与工程方法。</a:t>
@@ -3834,9 +3838,9 @@
                 <a:solidFill>
                   <a:srgbClr val="000000"/>
                 </a:solidFill>
-                <a:latin typeface="Helvetica Neue"/>
-                <a:ea typeface="Helvetica Neue"/>
-                <a:cs typeface="Helvetica Neue"/>
+                <a:latin typeface="Alibaba PuHuiTi"/>
+                <a:ea typeface="Alibaba PuHuiTi"/>
+                <a:cs typeface="Alibaba PuHuiTi"/>
               </a:defRPr>
             </a:pPr>
             <a:r>
@@ -3844,9 +3848,9 @@
                 <a:solidFill>
                   <a:srgbClr val="565D68"/>
                 </a:solidFill>
-                <a:latin typeface="PingFang SC"/>
-                <a:ea typeface="PingFang SC"/>
-                <a:cs typeface="PingFang SC"/>
+                <a:latin typeface="Alibaba PuHuiTi"/>
+                <a:ea typeface="Alibaba PuHuiTi"/>
+                <a:cs typeface="Alibaba PuHuiTi"/>
               </a:rPr>
               <a:t>5</a:t>
             </a:r>
@@ -3891,9 +3895,9 @@
                 <a:solidFill>
                   <a:srgbClr val="000000"/>
                 </a:solidFill>
-                <a:latin typeface="Helvetica Neue"/>
-                <a:ea typeface="Helvetica Neue"/>
-                <a:cs typeface="Helvetica Neue"/>
+                <a:latin typeface="Alibaba PuHuiTi"/>
+                <a:ea typeface="Alibaba PuHuiTi"/>
+                <a:cs typeface="Alibaba PuHuiTi"/>
               </a:defRPr>
             </a:pPr>
             <a:r>
@@ -3901,9 +3905,9 @@
                 <a:solidFill>
                   <a:srgbClr val="111318"/>
                 </a:solidFill>
-                <a:latin typeface="PingFang SC"/>
-                <a:ea typeface="PingFang SC"/>
-                <a:cs typeface="PingFang SC"/>
+                <a:latin typeface="Alibaba PuHuiTi"/>
+                <a:ea typeface="Alibaba PuHuiTi"/>
+                <a:cs typeface="Alibaba PuHuiTi"/>
               </a:rPr>
               <a:t>这个列表学会了安装自己</a:t>
             </a:r>
@@ -3983,9 +3987,9 @@
                 <a:solidFill>
                   <a:srgbClr val="000000"/>
                 </a:solidFill>
-                <a:latin typeface="Helvetica Neue"/>
-                <a:ea typeface="Helvetica Neue"/>
-                <a:cs typeface="Helvetica Neue"/>
+                <a:latin typeface="Alibaba PuHuiTi"/>
+                <a:ea typeface="Alibaba PuHuiTi"/>
+                <a:cs typeface="Alibaba PuHuiTi"/>
               </a:defRPr>
             </a:pPr>
             <a:r>
@@ -3993,9 +3997,9 @@
                 <a:solidFill>
                   <a:srgbClr val="111318"/>
                 </a:solidFill>
-                <a:latin typeface="PingFang SC"/>
-                <a:ea typeface="PingFang SC"/>
-                <a:cs typeface="PingFang SC"/>
+                <a:latin typeface="Alibaba PuHuiTi"/>
+                <a:ea typeface="Alibaba PuHuiTi"/>
+                <a:cs typeface="Alibaba PuHuiTi"/>
               </a:rPr>
               <a:t>vercel-labs/skills</a:t>
             </a:r>
@@ -4010,9 +4014,9 @@
                 <a:solidFill>
                   <a:srgbClr val="000000"/>
                 </a:solidFill>
-                <a:latin typeface="Helvetica Neue"/>
-                <a:ea typeface="Helvetica Neue"/>
-                <a:cs typeface="Helvetica Neue"/>
+                <a:latin typeface="Alibaba PuHuiTi"/>
+                <a:ea typeface="Alibaba PuHuiTi"/>
+                <a:cs typeface="Alibaba PuHuiTi"/>
               </a:defRPr>
             </a:pPr>
             <a:r>
@@ -4020,9 +4024,9 @@
                 <a:solidFill>
                   <a:srgbClr val="565D68"/>
                 </a:solidFill>
-                <a:latin typeface="PingFang SC"/>
-                <a:ea typeface="PingFang SC"/>
-                <a:cs typeface="PingFang SC"/>
+                <a:latin typeface="Alibaba PuHuiTi"/>
+                <a:ea typeface="Alibaba PuHuiTi"/>
+                <a:cs typeface="Alibaba PuHuiTi"/>
               </a:rPr>
               <a:t>过去，我们打开 awesome 列表，点链接，再把东西搬进自己的项目。
 这里，一条命令完成发现、选择和安装。目录第一次带上了“执行语义”。</a:t>
@@ -4032,14 +4036,14 @@
       </p:sp>
       <p:pic>
         <p:nvPicPr>
-          <p:cNvPr id="13" name=""/>
+          <p:cNvPr id="15" name=""/>
           <p:cNvPicPr>
             <a:picLocks xmlns:a="http://schemas.openxmlformats.org/drawingml/2006/main" noChangeAspect="1"/>
           </p:cNvPicPr>
           <p:nvPr/>
         </p:nvPicPr>
         <p:blipFill>
-          <a:blip xmlns:r="http://schemas.openxmlformats.org/officeDocument/2006/relationships" xmlns:a="http://schemas.openxmlformats.org/drawingml/2006/main" r:embed="R9911b48e46124364"/>
+          <a:blip xmlns:r="http://schemas.openxmlformats.org/officeDocument/2006/relationships" xmlns:a="http://schemas.openxmlformats.org/drawingml/2006/main" r:embed="R879ffb313cff4ba9"/>
           <a:srcRect xmlns:a="http://schemas.openxmlformats.org/drawingml/2006/main" l="0" t="0" r="0" b="0"/>
           <a:stretch xmlns:a="http://schemas.openxmlformats.org/drawingml/2006/main">
             <a:fillRect l="0" t="0" r="0" b="0"/>
@@ -4094,13 +4098,14 @@
           <a:lstStyle xmlns:a="http://schemas.openxmlformats.org/drawingml/2006/main"/>
           <a:p xmlns:a="http://schemas.openxmlformats.org/drawingml/2006/main">
             <a:pPr algn="l">
+              <a:buNone/>
               <a:defRPr sz="1650" b="1">
                 <a:solidFill>
                   <a:srgbClr val="111318"/>
                 </a:solidFill>
-                <a:latin typeface="SFMono-Regular"/>
-                <a:ea typeface="SFMono-Regular"/>
-                <a:cs typeface="SFMono-Regular"/>
+                <a:latin typeface="Alibaba PuHuiTi"/>
+                <a:ea typeface="Alibaba PuHuiTi"/>
+                <a:cs typeface="Alibaba PuHuiTi"/>
               </a:defRPr>
             </a:pPr>
             <a:r>
@@ -4108,9 +4113,9 @@
                 <a:solidFill>
                   <a:srgbClr val="111318"/>
                 </a:solidFill>
-                <a:latin typeface="SFMono-Regular"/>
-                <a:ea typeface="SFMono-Regular"/>
-                <a:cs typeface="SFMono-Regular"/>
+                <a:latin typeface="Alibaba PuHuiTi"/>
+                <a:ea typeface="Alibaba PuHuiTi"/>
+                <a:cs typeface="Alibaba PuHuiTi"/>
               </a:rPr>
               <a:t>npx skills add vercel-labs/agent-skills</a:t>
             </a:r>
@@ -4150,13 +4155,14 @@
           <a:lstStyle xmlns:a="http://schemas.openxmlformats.org/drawingml/2006/main"/>
           <a:p xmlns:a="http://schemas.openxmlformats.org/drawingml/2006/main">
             <a:pPr algn="l">
+              <a:buNone/>
               <a:defRPr sz="1275" b="0">
                 <a:solidFill>
                   <a:srgbClr val="565D68"/>
                 </a:solidFill>
-                <a:latin typeface="PingFang SC"/>
-                <a:ea typeface="PingFang SC"/>
-                <a:cs typeface="PingFang SC"/>
+                <a:latin typeface="Alibaba PuHuiTi"/>
+                <a:ea typeface="Alibaba PuHuiTi"/>
+                <a:cs typeface="Alibaba PuHuiTi"/>
               </a:defRPr>
             </a:pPr>
             <a:r>
@@ -4164,9 +4170,9 @@
                 <a:solidFill>
                   <a:srgbClr val="565D68"/>
                 </a:solidFill>
-                <a:latin typeface="PingFang SC"/>
-                <a:ea typeface="PingFang SC"/>
-                <a:cs typeface="PingFang SC"/>
+                <a:latin typeface="Alibaba PuHuiTi"/>
+                <a:ea typeface="Alibaba PuHuiTi"/>
+                <a:cs typeface="Alibaba PuHuiTi"/>
               </a:rPr>
               <a:t>也可以不安装：skills use 会生成 prompt，直接启动一个受支持的 coding agent。</a:t>
             </a:r>
@@ -4233,9 +4239,9 @@
                 <a:solidFill>
                   <a:srgbClr val="000000"/>
                 </a:solidFill>
-                <a:latin typeface="Helvetica Neue"/>
-                <a:ea typeface="Helvetica Neue"/>
-                <a:cs typeface="Helvetica Neue"/>
+                <a:latin typeface="Alibaba PuHuiTi"/>
+                <a:ea typeface="Alibaba PuHuiTi"/>
+                <a:cs typeface="Alibaba PuHuiTi"/>
               </a:defRPr>
             </a:pPr>
             <a:r>
@@ -4243,9 +4249,9 @@
                 <a:solidFill>
                   <a:srgbClr val="565D68"/>
                 </a:solidFill>
-                <a:latin typeface="PingFang SC"/>
-                <a:ea typeface="PingFang SC"/>
-                <a:cs typeface="PingFang SC"/>
+                <a:latin typeface="Alibaba PuHuiTi"/>
+                <a:ea typeface="Alibaba PuHuiTi"/>
+                <a:cs typeface="Alibaba PuHuiTi"/>
               </a:rPr>
               <a:t>6</a:t>
             </a:r>
@@ -4290,9 +4296,9 @@
                 <a:solidFill>
                   <a:srgbClr val="000000"/>
                 </a:solidFill>
-                <a:latin typeface="Helvetica Neue"/>
-                <a:ea typeface="Helvetica Neue"/>
-                <a:cs typeface="Helvetica Neue"/>
+                <a:latin typeface="Alibaba PuHuiTi"/>
+                <a:ea typeface="Alibaba PuHuiTi"/>
+                <a:cs typeface="Alibaba PuHuiTi"/>
               </a:defRPr>
             </a:pPr>
             <a:r>
@@ -4300,9 +4306,9 @@
                 <a:solidFill>
                   <a:srgbClr val="111318"/>
                 </a:solidFill>
-                <a:latin typeface="PingFang SC"/>
-                <a:ea typeface="PingFang SC"/>
-                <a:cs typeface="PingFang SC"/>
+                <a:latin typeface="Alibaba PuHuiTi"/>
+                <a:ea typeface="Alibaba PuHuiTi"/>
+                <a:cs typeface="Alibaba PuHuiTi"/>
               </a:rPr>
               <a:t>专业手艺开始被压进一份 Markdown</a:t>
             </a:r>
@@ -4376,9 +4382,9 @@
                 <a:solidFill>
                   <a:srgbClr val="000000"/>
                 </a:solidFill>
-                <a:latin typeface="Helvetica Neue"/>
-                <a:ea typeface="Helvetica Neue"/>
-                <a:cs typeface="Helvetica Neue"/>
+                <a:latin typeface="Alibaba PuHuiTi"/>
+                <a:ea typeface="Alibaba PuHuiTi"/>
+                <a:cs typeface="Alibaba PuHuiTi"/>
               </a:defRPr>
             </a:pPr>
             <a:r>
@@ -4386,9 +4392,9 @@
                 <a:solidFill>
                   <a:srgbClr val="111318"/>
                 </a:solidFill>
-                <a:latin typeface="PingFang SC"/>
-                <a:ea typeface="PingFang SC"/>
-                <a:cs typeface="PingFang SC"/>
+                <a:latin typeface="Alibaba PuHuiTi"/>
+                <a:ea typeface="Alibaba PuHuiTi"/>
+                <a:cs typeface="Alibaba PuHuiTi"/>
               </a:rPr>
               <a:t>DESIGN.md
 “build me a page that looks like this”</a:t>
@@ -4434,9 +4440,9 @@
                 <a:solidFill>
                   <a:srgbClr val="000000"/>
                 </a:solidFill>
-                <a:latin typeface="Helvetica Neue"/>
-                <a:ea typeface="Helvetica Neue"/>
-                <a:cs typeface="Helvetica Neue"/>
+                <a:latin typeface="Alibaba PuHuiTi"/>
+                <a:ea typeface="Alibaba PuHuiTi"/>
+                <a:cs typeface="Alibaba PuHuiTi"/>
               </a:defRPr>
             </a:pPr>
             <a:r>
@@ -4444,9 +4450,9 @@
                 <a:solidFill>
                   <a:srgbClr val="111318"/>
                 </a:solidFill>
-                <a:latin typeface="PingFang SC"/>
-                <a:ea typeface="PingFang SC"/>
-                <a:cs typeface="PingFang SC"/>
+                <a:latin typeface="Alibaba PuHuiTi"/>
+                <a:ea typeface="Alibaba PuHuiTi"/>
+                <a:cs typeface="Alibaba PuHuiTi"/>
               </a:rPr>
               <a:t>复制一个 DESIGN.md 到项目根目录。</a:t>
             </a:r>
@@ -4461,9 +4467,9 @@
                 <a:solidFill>
                   <a:srgbClr val="000000"/>
                 </a:solidFill>
-                <a:latin typeface="Helvetica Neue"/>
-                <a:ea typeface="Helvetica Neue"/>
-                <a:cs typeface="Helvetica Neue"/>
+                <a:latin typeface="Alibaba PuHuiTi"/>
+                <a:ea typeface="Alibaba PuHuiTi"/>
+                <a:cs typeface="Alibaba PuHuiTi"/>
               </a:defRPr>
             </a:pPr>
             <a:r>
@@ -4471,9 +4477,9 @@
                 <a:solidFill>
                   <a:srgbClr val="111318"/>
                 </a:solidFill>
-                <a:latin typeface="PingFang SC"/>
-                <a:ea typeface="PingFang SC"/>
-                <a:cs typeface="PingFang SC"/>
+                <a:latin typeface="Alibaba PuHuiTi"/>
+                <a:ea typeface="Alibaba PuHuiTi"/>
+                <a:cs typeface="Alibaba PuHuiTi"/>
               </a:rPr>
               <a:t>颜色、排版、组件和禁区都写进去。</a:t>
             </a:r>
@@ -4488,9 +4494,9 @@
                 <a:solidFill>
                   <a:srgbClr val="000000"/>
                 </a:solidFill>
-                <a:latin typeface="Helvetica Neue"/>
-                <a:ea typeface="Helvetica Neue"/>
-                <a:cs typeface="Helvetica Neue"/>
+                <a:latin typeface="Alibaba PuHuiTi"/>
+                <a:ea typeface="Alibaba PuHuiTi"/>
+                <a:cs typeface="Alibaba PuHuiTi"/>
               </a:defRPr>
             </a:pPr>
             <a:r>
@@ -4498,9 +4504,9 @@
                 <a:solidFill>
                   <a:srgbClr val="111318"/>
                 </a:solidFill>
-                <a:latin typeface="PingFang SC"/>
-                <a:ea typeface="PingFang SC"/>
-                <a:cs typeface="PingFang SC"/>
+                <a:latin typeface="Alibaba PuHuiTi"/>
+                <a:ea typeface="Alibaba PuHuiTi"/>
+                <a:cs typeface="Alibaba PuHuiTi"/>
               </a:rPr>
               <a:t>agent 读的不是链接，而是一套视觉语言。</a:t>
             </a:r>
@@ -4574,9 +4580,9 @@
                 <a:solidFill>
                   <a:srgbClr val="000000"/>
                 </a:solidFill>
-                <a:latin typeface="Helvetica Neue"/>
-                <a:ea typeface="Helvetica Neue"/>
-                <a:cs typeface="Helvetica Neue"/>
+                <a:latin typeface="Alibaba PuHuiTi"/>
+                <a:ea typeface="Alibaba PuHuiTi"/>
+                <a:cs typeface="Alibaba PuHuiTi"/>
               </a:defRPr>
             </a:pPr>
             <a:r>
@@ -4584,9 +4590,9 @@
                 <a:solidFill>
                   <a:srgbClr val="111318"/>
                 </a:solidFill>
-                <a:latin typeface="PingFang SC"/>
-                <a:ea typeface="PingFang SC"/>
-                <a:cs typeface="PingFang SC"/>
+                <a:latin typeface="Alibaba PuHuiTi"/>
+                <a:ea typeface="Alibaba PuHuiTi"/>
+                <a:cs typeface="Alibaba PuHuiTi"/>
               </a:rPr>
               <a:t>style-library.json
 → website + Agent Skill</a:t>
@@ -4632,9 +4638,9 @@
                 <a:solidFill>
                   <a:srgbClr val="000000"/>
                 </a:solidFill>
-                <a:latin typeface="Helvetica Neue"/>
-                <a:ea typeface="Helvetica Neue"/>
-                <a:cs typeface="Helvetica Neue"/>
+                <a:latin typeface="Alibaba PuHuiTi"/>
+                <a:ea typeface="Alibaba PuHuiTi"/>
+                <a:cs typeface="Alibaba PuHuiTi"/>
               </a:defRPr>
             </a:pPr>
             <a:r>
@@ -4642,9 +4648,9 @@
                 <a:solidFill>
                   <a:srgbClr val="111318"/>
                 </a:solidFill>
-                <a:latin typeface="PingFang SC"/>
-                <a:ea typeface="PingFang SC"/>
-                <a:cs typeface="PingFang SC"/>
+                <a:latin typeface="Alibaba PuHuiTi"/>
+                <a:ea typeface="Alibaba PuHuiTi"/>
+                <a:cs typeface="Alibaba PuHuiTi"/>
               </a:rPr>
               <a:t>470+ 案例和 20+ 模板共用一份 style library。</a:t>
             </a:r>
@@ -4659,9 +4665,9 @@
                 <a:solidFill>
                   <a:srgbClr val="000000"/>
                 </a:solidFill>
-                <a:latin typeface="Helvetica Neue"/>
-                <a:ea typeface="Helvetica Neue"/>
-                <a:cs typeface="Helvetica Neue"/>
+                <a:latin typeface="Alibaba PuHuiTi"/>
+                <a:ea typeface="Alibaba PuHuiTi"/>
+                <a:cs typeface="Alibaba PuHuiTi"/>
               </a:defRPr>
             </a:pPr>
             <a:r>
@@ -4669,9 +4675,9 @@
                 <a:solidFill>
                   <a:srgbClr val="111318"/>
                 </a:solidFill>
-                <a:latin typeface="PingFang SC"/>
-                <a:ea typeface="PingFang SC"/>
-                <a:cs typeface="PingFang SC"/>
+                <a:latin typeface="Alibaba PuHuiTi"/>
+                <a:ea typeface="Alibaba PuHuiTi"/>
+                <a:cs typeface="Alibaba PuHuiTi"/>
               </a:rPr>
               <a:t>同一份数据同时驱动网站和 agent skill。</a:t>
             </a:r>
@@ -4686,9 +4692,9 @@
                 <a:solidFill>
                   <a:srgbClr val="000000"/>
                 </a:solidFill>
-                <a:latin typeface="Helvetica Neue"/>
-                <a:ea typeface="Helvetica Neue"/>
-                <a:cs typeface="Helvetica Neue"/>
+                <a:latin typeface="Alibaba PuHuiTi"/>
+                <a:ea typeface="Alibaba PuHuiTi"/>
+                <a:cs typeface="Alibaba PuHuiTi"/>
               </a:defRPr>
             </a:pPr>
             <a:r>
@@ -4696,9 +4702,9 @@
                 <a:solidFill>
                   <a:srgbClr val="111318"/>
                 </a:solidFill>
-                <a:latin typeface="PingFang SC"/>
-                <a:ea typeface="PingFang SC"/>
-                <a:cs typeface="PingFang SC"/>
+                <a:latin typeface="Alibaba PuHuiTi"/>
+                <a:ea typeface="Alibaba PuHuiTi"/>
+                <a:cs typeface="Alibaba PuHuiTi"/>
               </a:rPr>
               <a:t>Prompt gallery 开始像软件包一样分发。</a:t>
             </a:r>
@@ -4735,13 +4741,14 @@
           <a:lstStyle xmlns:a="http://schemas.openxmlformats.org/drawingml/2006/main"/>
           <a:p xmlns:a="http://schemas.openxmlformats.org/drawingml/2006/main">
             <a:pPr algn="l">
+              <a:buNone/>
               <a:defRPr sz="1600">
                 <a:solidFill>
                   <a:srgbClr val="000000"/>
                 </a:solidFill>
-                <a:latin typeface="Helvetica Neue"/>
-                <a:ea typeface="Helvetica Neue"/>
-                <a:cs typeface="Helvetica Neue"/>
+                <a:latin typeface="Alibaba PuHuiTi"/>
+                <a:ea typeface="Alibaba PuHuiTi"/>
+                <a:cs typeface="Alibaba PuHuiTi"/>
               </a:defRPr>
             </a:pPr>
             <a:r>
@@ -4750,13 +4757,14 @@
           </a:p>
           <a:p xmlns:a="http://schemas.openxmlformats.org/drawingml/2006/main">
             <a:pPr algn="l">
+              <a:buNone/>
               <a:defRPr sz="1600">
                 <a:solidFill>
                   <a:srgbClr val="000000"/>
                 </a:solidFill>
-                <a:latin typeface="Helvetica Neue"/>
-                <a:ea typeface="Helvetica Neue"/>
-                <a:cs typeface="Helvetica Neue"/>
+                <a:latin typeface="Alibaba PuHuiTi"/>
+                <a:ea typeface="Alibaba PuHuiTi"/>
+                <a:cs typeface="Alibaba PuHuiTi"/>
               </a:defRPr>
             </a:pPr>
             <a:r>
@@ -4765,13 +4773,14 @@
           </a:p>
           <a:p xmlns:a="http://schemas.openxmlformats.org/drawingml/2006/main">
             <a:pPr algn="l">
+              <a:buNone/>
               <a:defRPr sz="1600">
                 <a:solidFill>
                   <a:srgbClr val="000000"/>
                 </a:solidFill>
-                <a:latin typeface="Helvetica Neue"/>
-                <a:ea typeface="Helvetica Neue"/>
-                <a:cs typeface="Helvetica Neue"/>
+                <a:latin typeface="Alibaba PuHuiTi"/>
+                <a:ea typeface="Alibaba PuHuiTi"/>
+                <a:cs typeface="Alibaba PuHuiTi"/>
               </a:defRPr>
             </a:pPr>
             <a:r>
@@ -4782,14 +4791,14 @@
       </p:sp>
       <p:pic>
         <p:nvPicPr>
-          <p:cNvPr id="21" name=""/>
+          <p:cNvPr id="24" name=""/>
           <p:cNvPicPr>
             <a:picLocks xmlns:a="http://schemas.openxmlformats.org/drawingml/2006/main" noChangeAspect="1"/>
           </p:cNvPicPr>
           <p:nvPr/>
         </p:nvPicPr>
         <p:blipFill>
-          <a:blip xmlns:r="http://schemas.openxmlformats.org/officeDocument/2006/relationships" xmlns:a="http://schemas.openxmlformats.org/drawingml/2006/main" r:embed="Re52b88ed982f4538"/>
+          <a:blip xmlns:r="http://schemas.openxmlformats.org/officeDocument/2006/relationships" xmlns:a="http://schemas.openxmlformats.org/drawingml/2006/main" r:embed="R1ceccd2dcba94454"/>
           <a:srcRect xmlns:a="http://schemas.openxmlformats.org/drawingml/2006/main" l="0" t="18675" r="0" b="18675"/>
           <a:stretch xmlns:a="http://schemas.openxmlformats.org/drawingml/2006/main">
             <a:fillRect l="0" t="0" r="0" b="0"/>
@@ -4809,14 +4818,14 @@
       </p:pic>
       <p:pic>
         <p:nvPicPr>
-          <p:cNvPr id="22" name=""/>
+          <p:cNvPr id="25" name=""/>
           <p:cNvPicPr>
             <a:picLocks xmlns:a="http://schemas.openxmlformats.org/drawingml/2006/main" noChangeAspect="1"/>
           </p:cNvPicPr>
           <p:nvPr/>
         </p:nvPicPr>
         <p:blipFill>
-          <a:blip xmlns:r="http://schemas.openxmlformats.org/officeDocument/2006/relationships" xmlns:a="http://schemas.openxmlformats.org/drawingml/2006/main" r:embed="Rc3835c9762574b40"/>
+          <a:blip xmlns:r="http://schemas.openxmlformats.org/officeDocument/2006/relationships" xmlns:a="http://schemas.openxmlformats.org/drawingml/2006/main" r:embed="Rcb35b0a390ff44e9"/>
           <a:srcRect xmlns:a="http://schemas.openxmlformats.org/drawingml/2006/main" l="0" t="18675" r="0" b="18675"/>
           <a:stretch xmlns:a="http://schemas.openxmlformats.org/drawingml/2006/main">
             <a:fillRect l="0" t="0" r="0" b="0"/>
@@ -4892,9 +4901,9 @@
                 <a:solidFill>
                   <a:srgbClr val="000000"/>
                 </a:solidFill>
-                <a:latin typeface="Helvetica Neue"/>
-                <a:ea typeface="Helvetica Neue"/>
-                <a:cs typeface="Helvetica Neue"/>
+                <a:latin typeface="Alibaba PuHuiTi"/>
+                <a:ea typeface="Alibaba PuHuiTi"/>
+                <a:cs typeface="Alibaba PuHuiTi"/>
               </a:defRPr>
             </a:pPr>
             <a:r>
@@ -4902,9 +4911,9 @@
                 <a:solidFill>
                   <a:srgbClr val="565D68"/>
                 </a:solidFill>
-                <a:latin typeface="PingFang SC"/>
-                <a:ea typeface="PingFang SC"/>
-                <a:cs typeface="PingFang SC"/>
+                <a:latin typeface="Alibaba PuHuiTi"/>
+                <a:ea typeface="Alibaba PuHuiTi"/>
+                <a:cs typeface="Alibaba PuHuiTi"/>
               </a:rPr>
               <a:t>7</a:t>
             </a:r>
@@ -4949,9 +4958,9 @@
                 <a:solidFill>
                   <a:srgbClr val="000000"/>
                 </a:solidFill>
-                <a:latin typeface="Helvetica Neue"/>
-                <a:ea typeface="Helvetica Neue"/>
-                <a:cs typeface="Helvetica Neue"/>
+                <a:latin typeface="Alibaba PuHuiTi"/>
+                <a:ea typeface="Alibaba PuHuiTi"/>
+                <a:cs typeface="Alibaba PuHuiTi"/>
               </a:defRPr>
             </a:pPr>
             <a:r>
@@ -4959,9 +4968,9 @@
                 <a:solidFill>
                   <a:srgbClr val="111318"/>
                 </a:solidFill>
-                <a:latin typeface="PingFang SC"/>
-                <a:ea typeface="PingFang SC"/>
-                <a:cs typeface="PingFang SC"/>
+                <a:latin typeface="Alibaba PuHuiTi"/>
+                <a:ea typeface="Alibaba PuHuiTi"/>
+                <a:cs typeface="Alibaba PuHuiTi"/>
               </a:rPr>
               <a:t>Superpowers 最反直觉的设计，是先让 agent 慢下来</a:t>
             </a:r>
@@ -4970,7 +4979,7 @@
       </p:sp>
       <p:cxnSp>
         <p:nvCxnSpPr>
-          <p:cNvPr id="17" name="Google-Shape-2259-p159-4"/>
+          <p:cNvPr id="25" name="Google-Shape-2259-p159-4"/>
           <p:cNvCxnSpPr/>
           <p:nvPr/>
         </p:nvCxnSpPr>
@@ -5109,9 +5118,9 @@
                 <a:solidFill>
                   <a:srgbClr val="000000"/>
                 </a:solidFill>
-                <a:latin typeface="Helvetica Neue"/>
-                <a:ea typeface="Helvetica Neue"/>
-                <a:cs typeface="Helvetica Neue"/>
+                <a:latin typeface="Alibaba PuHuiTi"/>
+                <a:ea typeface="Alibaba PuHuiTi"/>
+                <a:cs typeface="Alibaba PuHuiTi"/>
               </a:defRPr>
             </a:pPr>
             <a:r>
@@ -5119,9 +5128,9 @@
                 <a:solidFill>
                   <a:srgbClr val="3D8DFF"/>
                 </a:solidFill>
-                <a:latin typeface="PingFang SC"/>
-                <a:ea typeface="PingFang SC"/>
-                <a:cs typeface="PingFang SC"/>
+                <a:latin typeface="Alibaba PuHuiTi"/>
+                <a:ea typeface="Alibaba PuHuiTi"/>
+                <a:cs typeface="Alibaba PuHuiTi"/>
               </a:rPr>
               <a:t>先聊清楚</a:t>
             </a:r>
@@ -5166,9 +5175,9 @@
                 <a:solidFill>
                   <a:srgbClr val="000000"/>
                 </a:solidFill>
-                <a:latin typeface="Helvetica Neue"/>
-                <a:ea typeface="Helvetica Neue"/>
-                <a:cs typeface="Helvetica Neue"/>
+                <a:latin typeface="Alibaba PuHuiTi"/>
+                <a:ea typeface="Alibaba PuHuiTi"/>
+                <a:cs typeface="Alibaba PuHuiTi"/>
               </a:defRPr>
             </a:pPr>
             <a:r>
@@ -5176,9 +5185,9 @@
                 <a:solidFill>
                   <a:srgbClr val="3D8DFF"/>
                 </a:solidFill>
-                <a:latin typeface="PingFang SC"/>
-                <a:ea typeface="PingFang SC"/>
-                <a:cs typeface="PingFang SC"/>
+                <a:latin typeface="Alibaba PuHuiTi"/>
+                <a:ea typeface="Alibaba PuHuiTi"/>
+                <a:cs typeface="Alibaba PuHuiTi"/>
               </a:rPr>
               <a:t>再写计划</a:t>
             </a:r>
@@ -5223,9 +5232,9 @@
                 <a:solidFill>
                   <a:srgbClr val="000000"/>
                 </a:solidFill>
-                <a:latin typeface="Helvetica Neue"/>
-                <a:ea typeface="Helvetica Neue"/>
-                <a:cs typeface="Helvetica Neue"/>
+                <a:latin typeface="Alibaba PuHuiTi"/>
+                <a:ea typeface="Alibaba PuHuiTi"/>
+                <a:cs typeface="Alibaba PuHuiTi"/>
               </a:defRPr>
             </a:pPr>
             <a:r>
@@ -5233,9 +5242,9 @@
                 <a:solidFill>
                   <a:srgbClr val="3D8DFF"/>
                 </a:solidFill>
-                <a:latin typeface="PingFang SC"/>
-                <a:ea typeface="PingFang SC"/>
-                <a:cs typeface="PingFang SC"/>
+                <a:latin typeface="Alibaba PuHuiTi"/>
+                <a:ea typeface="Alibaba PuHuiTi"/>
+                <a:cs typeface="Alibaba PuHuiTi"/>
               </a:rPr>
               <a:t>最后开工</a:t>
             </a:r>
@@ -5280,9 +5289,9 @@
                 <a:solidFill>
                   <a:srgbClr val="000000"/>
                 </a:solidFill>
-                <a:latin typeface="Helvetica Neue"/>
-                <a:ea typeface="Helvetica Neue"/>
-                <a:cs typeface="Helvetica Neue"/>
+                <a:latin typeface="Alibaba PuHuiTi"/>
+                <a:ea typeface="Alibaba PuHuiTi"/>
+                <a:cs typeface="Alibaba PuHuiTi"/>
               </a:defRPr>
             </a:pPr>
             <a:r>
@@ -5290,9 +5299,9 @@
                 <a:solidFill>
                   <a:srgbClr val="111318"/>
                 </a:solidFill>
-                <a:latin typeface="PingFang SC"/>
-                <a:ea typeface="PingFang SC"/>
-                <a:cs typeface="PingFang SC"/>
+                <a:latin typeface="Alibaba PuHuiTi"/>
+                <a:ea typeface="Alibaba PuHuiTi"/>
+                <a:cs typeface="Alibaba PuHuiTi"/>
               </a:rPr>
               <a:t>把判断变成顺序</a:t>
             </a:r>
@@ -5307,9 +5316,9 @@
                 <a:solidFill>
                   <a:srgbClr val="000000"/>
                 </a:solidFill>
-                <a:latin typeface="Helvetica Neue"/>
-                <a:ea typeface="Helvetica Neue"/>
-                <a:cs typeface="Helvetica Neue"/>
+                <a:latin typeface="Alibaba PuHuiTi"/>
+                <a:ea typeface="Alibaba PuHuiTi"/>
+                <a:cs typeface="Alibaba PuHuiTi"/>
               </a:defRPr>
             </a:pPr>
             <a:r>
@@ -5317,9 +5326,9 @@
                 <a:solidFill>
                   <a:srgbClr val="565D68"/>
                 </a:solidFill>
-                <a:latin typeface="PingFang SC"/>
-                <a:ea typeface="PingFang SC"/>
-                <a:cs typeface="PingFang SC"/>
+                <a:latin typeface="Alibaba PuHuiTi"/>
+                <a:ea typeface="Alibaba PuHuiTi"/>
+                <a:cs typeface="Alibaba PuHuiTi"/>
               </a:rPr>
               <a:t>拆任务、写验证步骤，把上下文和验收条件交代清楚。</a:t>
             </a:r>
@@ -5364,9 +5373,9 @@
                 <a:solidFill>
                   <a:srgbClr val="000000"/>
                 </a:solidFill>
-                <a:latin typeface="Helvetica Neue"/>
-                <a:ea typeface="Helvetica Neue"/>
-                <a:cs typeface="Helvetica Neue"/>
+                <a:latin typeface="Alibaba PuHuiTi"/>
+                <a:ea typeface="Alibaba PuHuiTi"/>
+                <a:cs typeface="Alibaba PuHuiTi"/>
               </a:defRPr>
             </a:pPr>
             <a:r>
@@ -5374,9 +5383,9 @@
                 <a:solidFill>
                   <a:srgbClr val="111318"/>
                 </a:solidFill>
-                <a:latin typeface="PingFang SC"/>
-                <a:ea typeface="PingFang SC"/>
-                <a:cs typeface="PingFang SC"/>
+                <a:latin typeface="Alibaba PuHuiTi"/>
+                <a:ea typeface="Alibaba PuHuiTi"/>
+                <a:cs typeface="Alibaba PuHuiTi"/>
               </a:rPr>
               <a:t>把想法变成规格</a:t>
             </a:r>
@@ -5391,9 +5400,9 @@
                 <a:solidFill>
                   <a:srgbClr val="000000"/>
                 </a:solidFill>
-                <a:latin typeface="Helvetica Neue"/>
-                <a:ea typeface="Helvetica Neue"/>
-                <a:cs typeface="Helvetica Neue"/>
+                <a:latin typeface="Alibaba PuHuiTi"/>
+                <a:ea typeface="Alibaba PuHuiTi"/>
+                <a:cs typeface="Alibaba PuHuiTi"/>
               </a:defRPr>
             </a:pPr>
             <a:r>
@@ -5401,9 +5410,9 @@
                 <a:solidFill>
                   <a:srgbClr val="565D68"/>
                 </a:solidFill>
-                <a:latin typeface="PingFang SC"/>
-                <a:ea typeface="PingFang SC"/>
-                <a:cs typeface="PingFang SC"/>
+                <a:latin typeface="Alibaba PuHuiTi"/>
+                <a:ea typeface="Alibaba PuHuiTi"/>
+                <a:cs typeface="Alibaba PuHuiTi"/>
               </a:rPr>
               <a:t>先提问，分段确认设计，不急着生成代码。</a:t>
             </a:r>
@@ -5448,9 +5457,9 @@
                 <a:solidFill>
                   <a:srgbClr val="000000"/>
                 </a:solidFill>
-                <a:latin typeface="Helvetica Neue"/>
-                <a:ea typeface="Helvetica Neue"/>
-                <a:cs typeface="Helvetica Neue"/>
+                <a:latin typeface="Alibaba PuHuiTi"/>
+                <a:ea typeface="Alibaba PuHuiTi"/>
+                <a:cs typeface="Alibaba PuHuiTi"/>
               </a:defRPr>
             </a:pPr>
             <a:r>
@@ -5458,9 +5467,9 @@
                 <a:solidFill>
                   <a:srgbClr val="111318"/>
                 </a:solidFill>
-                <a:latin typeface="PingFang SC"/>
-                <a:ea typeface="PingFang SC"/>
-                <a:cs typeface="PingFang SC"/>
+                <a:latin typeface="Alibaba PuHuiTi"/>
+                <a:ea typeface="Alibaba PuHuiTi"/>
+                <a:cs typeface="Alibaba PuHuiTi"/>
               </a:rPr>
               <a:t>把过程变成技能</a:t>
             </a:r>
@@ -5475,9 +5484,9 @@
                 <a:solidFill>
                   <a:srgbClr val="000000"/>
                 </a:solidFill>
-                <a:latin typeface="Helvetica Neue"/>
-                <a:ea typeface="Helvetica Neue"/>
-                <a:cs typeface="Helvetica Neue"/>
+                <a:latin typeface="Alibaba PuHuiTi"/>
+                <a:ea typeface="Alibaba PuHuiTi"/>
+                <a:cs typeface="Alibaba PuHuiTi"/>
               </a:defRPr>
             </a:pPr>
             <a:r>
@@ -5485,9 +5494,9 @@
                 <a:solidFill>
                   <a:srgbClr val="565D68"/>
                 </a:solidFill>
-                <a:latin typeface="PingFang SC"/>
-                <a:ea typeface="PingFang SC"/>
-                <a:cs typeface="PingFang SC"/>
+                <a:latin typeface="Alibaba PuHuiTi"/>
+                <a:ea typeface="Alibaba PuHuiTi"/>
+                <a:cs typeface="Alibaba PuHuiTi"/>
               </a:rPr>
               <a:t>TDD、子 agent、两阶段 review 和收尾都有固定做法。</a:t>
             </a:r>
@@ -5496,14 +5505,14 @@
       </p:sp>
       <p:pic>
         <p:nvPicPr>
-          <p:cNvPr id="27" name=""/>
+          <p:cNvPr id="35" name=""/>
           <p:cNvPicPr>
             <a:picLocks xmlns:a="http://schemas.openxmlformats.org/drawingml/2006/main" noChangeAspect="1"/>
           </p:cNvPicPr>
           <p:nvPr/>
         </p:nvPicPr>
         <p:blipFill>
-          <a:blip xmlns:r="http://schemas.openxmlformats.org/officeDocument/2006/relationships" xmlns:a="http://schemas.openxmlformats.org/drawingml/2006/main" r:embed="Rad1b629ba7044f79"/>
+          <a:blip xmlns:r="http://schemas.openxmlformats.org/officeDocument/2006/relationships" xmlns:a="http://schemas.openxmlformats.org/drawingml/2006/main" r:embed="Rd6a4eecde5dd4ffe"/>
           <a:srcRect xmlns:a="http://schemas.openxmlformats.org/drawingml/2006/main" l="0" t="15297" r="0" b="15297"/>
           <a:stretch xmlns:a="http://schemas.openxmlformats.org/drawingml/2006/main">
             <a:fillRect l="0" t="0" r="0" b="0"/>
@@ -5554,13 +5563,14 @@
           <a:lstStyle xmlns:a="http://schemas.openxmlformats.org/drawingml/2006/main"/>
           <a:p xmlns:a="http://schemas.openxmlformats.org/drawingml/2006/main">
             <a:pPr algn="l">
+              <a:buNone/>
               <a:defRPr sz="2100" b="1">
                 <a:solidFill>
                   <a:srgbClr val="111318"/>
                 </a:solidFill>
-                <a:latin typeface="PingFang SC"/>
-                <a:ea typeface="PingFang SC"/>
-                <a:cs typeface="PingFang SC"/>
+                <a:latin typeface="Alibaba PuHuiTi"/>
+                <a:ea typeface="Alibaba PuHuiTi"/>
+                <a:cs typeface="Alibaba PuHuiTi"/>
               </a:defRPr>
             </a:pPr>
             <a:r>
@@ -5568,9 +5578,9 @@
                 <a:solidFill>
                   <a:srgbClr val="111318"/>
                 </a:solidFill>
-                <a:latin typeface="PingFang SC"/>
-                <a:ea typeface="PingFang SC"/>
-                <a:cs typeface="PingFang SC"/>
+                <a:latin typeface="Alibaba PuHuiTi"/>
+                <a:ea typeface="Alibaba PuHuiTi"/>
+                <a:cs typeface="Alibaba PuHuiTi"/>
               </a:rPr>
               <a:t>代码便宜之后，顺序、判断和复核变成更稀缺的资产。</a:t>
             </a:r>
@@ -5722,9 +5732,9 @@
                 <a:solidFill>
                   <a:srgbClr val="000000"/>
                 </a:solidFill>
-                <a:latin typeface="Helvetica Neue"/>
-                <a:ea typeface="Helvetica Neue"/>
-                <a:cs typeface="Helvetica Neue"/>
+                <a:latin typeface="Alibaba PuHuiTi"/>
+                <a:ea typeface="Alibaba PuHuiTi"/>
+                <a:cs typeface="Alibaba PuHuiTi"/>
               </a:defRPr>
             </a:pPr>
             <a:r>
@@ -5732,9 +5742,9 @@
                 <a:solidFill>
                   <a:srgbClr val="565D68"/>
                 </a:solidFill>
-                <a:latin typeface="PingFang SC"/>
-                <a:ea typeface="PingFang SC"/>
-                <a:cs typeface="PingFang SC"/>
+                <a:latin typeface="Alibaba PuHuiTi"/>
+                <a:ea typeface="Alibaba PuHuiTi"/>
+                <a:cs typeface="Alibaba PuHuiTi"/>
               </a:rPr>
               <a:t>8</a:t>
             </a:r>
@@ -5779,9 +5789,9 @@
                 <a:solidFill>
                   <a:srgbClr val="000000"/>
                 </a:solidFill>
-                <a:latin typeface="Helvetica Neue"/>
-                <a:ea typeface="Helvetica Neue"/>
-                <a:cs typeface="Helvetica Neue"/>
+                <a:latin typeface="Alibaba PuHuiTi"/>
+                <a:ea typeface="Alibaba PuHuiTi"/>
+                <a:cs typeface="Alibaba PuHuiTi"/>
               </a:defRPr>
             </a:pPr>
             <a:r>
@@ -5789,9 +5799,9 @@
                 <a:solidFill>
                   <a:srgbClr val="111318"/>
                 </a:solidFill>
-                <a:latin typeface="PingFang SC"/>
-                <a:ea typeface="PingFang SC"/>
-                <a:cs typeface="PingFang SC"/>
+                <a:latin typeface="Alibaba PuHuiTi"/>
+                <a:ea typeface="Alibaba PuHuiTi"/>
+                <a:cs typeface="Alibaba PuHuiTi"/>
               </a:rPr>
               <a:t>三家官方仓库正在用同一种文件组织 agent 能力</a:t>
             </a:r>
@@ -5836,9 +5846,9 @@
                 <a:solidFill>
                   <a:srgbClr val="000000"/>
                 </a:solidFill>
-                <a:latin typeface="Helvetica Neue"/>
-                <a:ea typeface="Helvetica Neue"/>
-                <a:cs typeface="Helvetica Neue"/>
+                <a:latin typeface="Alibaba PuHuiTi"/>
+                <a:ea typeface="Alibaba PuHuiTi"/>
+                <a:cs typeface="Alibaba PuHuiTi"/>
               </a:defRPr>
             </a:pPr>
             <a:r>
@@ -5846,9 +5856,9 @@
                 <a:solidFill>
                   <a:srgbClr val="565D68"/>
                 </a:solidFill>
-                <a:latin typeface="PingFang SC"/>
-                <a:ea typeface="PingFang SC"/>
-                <a:cs typeface="PingFang SC"/>
+                <a:latin typeface="Alibaba PuHuiTi"/>
+                <a:ea typeface="Alibaba PuHuiTi"/>
+                <a:cs typeface="Alibaba PuHuiTi"/>
               </a:rPr>
               <a:t>Anthropic
 自包含的说明、脚本与资源</a:t>
@@ -5894,9 +5904,9 @@
                 <a:solidFill>
                   <a:srgbClr val="000000"/>
                 </a:solidFill>
-                <a:latin typeface="Helvetica Neue"/>
-                <a:ea typeface="Helvetica Neue"/>
-                <a:cs typeface="Helvetica Neue"/>
+                <a:latin typeface="Alibaba PuHuiTi"/>
+                <a:ea typeface="Alibaba PuHuiTi"/>
+                <a:cs typeface="Alibaba PuHuiTi"/>
               </a:defRPr>
             </a:pPr>
             <a:r>
@@ -5904,9 +5914,9 @@
                 <a:solidFill>
                   <a:srgbClr val="565D68"/>
                 </a:solidFill>
-                <a:latin typeface="PingFang SC"/>
-                <a:ea typeface="PingFang SC"/>
-                <a:cs typeface="PingFang SC"/>
+                <a:latin typeface="Alibaba PuHuiTi"/>
+                <a:ea typeface="Alibaba PuHuiTi"/>
+                <a:cs typeface="Alibaba PuHuiTi"/>
               </a:rPr>
               <a:t>Google
 产品知识可以被选择并安装</a:t>
@@ -5952,9 +5962,9 @@
                 <a:solidFill>
                   <a:srgbClr val="000000"/>
                 </a:solidFill>
-                <a:latin typeface="Helvetica Neue"/>
-                <a:ea typeface="Helvetica Neue"/>
-                <a:cs typeface="Helvetica Neue"/>
+                <a:latin typeface="Alibaba PuHuiTi"/>
+                <a:ea typeface="Alibaba PuHuiTi"/>
+                <a:cs typeface="Alibaba PuHuiTi"/>
               </a:defRPr>
             </a:pPr>
             <a:r>
@@ -5962,9 +5972,9 @@
                 <a:solidFill>
                   <a:srgbClr val="565D68"/>
                 </a:solidFill>
-                <a:latin typeface="PingFang SC"/>
-                <a:ea typeface="PingFang SC"/>
-                <a:cs typeface="PingFang SC"/>
+                <a:latin typeface="Alibaba PuHuiTi"/>
+                <a:ea typeface="Alibaba PuHuiTi"/>
+                <a:cs typeface="Alibaba PuHuiTi"/>
               </a:rPr>
               <a:t>OpenAI
 agent 可发现、可复用的能力目录</a:t>
@@ -6010,9 +6020,9 @@
                 <a:solidFill>
                   <a:srgbClr val="000000"/>
                 </a:solidFill>
-                <a:latin typeface="Helvetica Neue"/>
-                <a:ea typeface="Helvetica Neue"/>
-                <a:cs typeface="Helvetica Neue"/>
+                <a:latin typeface="Alibaba PuHuiTi"/>
+                <a:ea typeface="Alibaba PuHuiTi"/>
+                <a:cs typeface="Alibaba PuHuiTi"/>
               </a:defRPr>
             </a:pPr>
             <a:r>
@@ -6020,9 +6030,9 @@
                 <a:solidFill>
                   <a:srgbClr val="111318"/>
                 </a:solidFill>
-                <a:latin typeface="PingFang SC"/>
-                <a:ea typeface="PingFang SC"/>
-                <a:cs typeface="PingFang SC"/>
+                <a:latin typeface="Alibaba PuHuiTi"/>
+                <a:ea typeface="Alibaba PuHuiTi"/>
+                <a:cs typeface="Alibaba PuHuiTi"/>
               </a:rPr>
               <a:t>SKILL.md</a:t>
             </a:r>
@@ -6067,9 +6077,9 @@
                 <a:solidFill>
                   <a:srgbClr val="000000"/>
                 </a:solidFill>
-                <a:latin typeface="Helvetica Neue"/>
-                <a:ea typeface="Helvetica Neue"/>
-                <a:cs typeface="Helvetica Neue"/>
+                <a:latin typeface="Alibaba PuHuiTi"/>
+                <a:ea typeface="Alibaba PuHuiTi"/>
+                <a:cs typeface="Alibaba PuHuiTi"/>
               </a:defRPr>
             </a:pPr>
             <a:r>
@@ -6077,9 +6087,9 @@
                 <a:solidFill>
                   <a:srgbClr val="3D8DFF"/>
                 </a:solidFill>
-                <a:latin typeface="PingFang SC"/>
-                <a:ea typeface="PingFang SC"/>
-                <a:cs typeface="PingFang SC"/>
+                <a:latin typeface="Alibaba PuHuiTi"/>
+                <a:ea typeface="Alibaba PuHuiTi"/>
+                <a:cs typeface="Alibaba PuHuiTi"/>
               </a:rPr>
               <a:t>write once</a:t>
             </a:r>
@@ -6124,9 +6134,9 @@
                 <a:solidFill>
                   <a:srgbClr val="000000"/>
                 </a:solidFill>
-                <a:latin typeface="Helvetica Neue"/>
-                <a:ea typeface="Helvetica Neue"/>
-                <a:cs typeface="Helvetica Neue"/>
+                <a:latin typeface="Alibaba PuHuiTi"/>
+                <a:ea typeface="Alibaba PuHuiTi"/>
+                <a:cs typeface="Alibaba PuHuiTi"/>
               </a:defRPr>
             </a:pPr>
             <a:r>
@@ -6134,9 +6144,9 @@
                 <a:solidFill>
                   <a:srgbClr val="111318"/>
                 </a:solidFill>
-                <a:latin typeface="PingFang SC"/>
-                <a:ea typeface="PingFang SC"/>
-                <a:cs typeface="PingFang SC"/>
+                <a:latin typeface="Alibaba PuHuiTi"/>
+                <a:ea typeface="Alibaba PuHuiTi"/>
+                <a:cs typeface="Alibaba PuHuiTi"/>
               </a:rPr>
               <a:t>npx add</a:t>
             </a:r>
@@ -6181,9 +6191,9 @@
                 <a:solidFill>
                   <a:srgbClr val="000000"/>
                 </a:solidFill>
-                <a:latin typeface="Helvetica Neue"/>
-                <a:ea typeface="Helvetica Neue"/>
-                <a:cs typeface="Helvetica Neue"/>
+                <a:latin typeface="Alibaba PuHuiTi"/>
+                <a:ea typeface="Alibaba PuHuiTi"/>
+                <a:cs typeface="Alibaba PuHuiTi"/>
               </a:defRPr>
             </a:pPr>
             <a:r>
@@ -6191,9 +6201,9 @@
                 <a:solidFill>
                   <a:srgbClr val="111318"/>
                 </a:solidFill>
-                <a:latin typeface="PingFang SC"/>
-                <a:ea typeface="PingFang SC"/>
-                <a:cs typeface="PingFang SC"/>
+                <a:latin typeface="Alibaba PuHuiTi"/>
+                <a:ea typeface="Alibaba PuHuiTi"/>
+                <a:cs typeface="Alibaba PuHuiTi"/>
               </a:rPr>
               <a:t>这不是单个社区的偶然实验。Anthropic、OpenAI 和 Google 都开始公开维护 skill 仓库。</a:t>
             </a:r>
@@ -6208,9 +6218,9 @@
                 <a:solidFill>
                   <a:srgbClr val="000000"/>
                 </a:solidFill>
-                <a:latin typeface="Helvetica Neue"/>
-                <a:ea typeface="Helvetica Neue"/>
-                <a:cs typeface="Helvetica Neue"/>
+                <a:latin typeface="Alibaba PuHuiTi"/>
+                <a:ea typeface="Alibaba PuHuiTi"/>
+                <a:cs typeface="Alibaba PuHuiTi"/>
               </a:defRPr>
             </a:pPr>
             <a:r>
@@ -6218,9 +6228,9 @@
                 <a:solidFill>
                   <a:srgbClr val="565D68"/>
                 </a:solidFill>
-                <a:latin typeface="PingFang SC"/>
-                <a:ea typeface="PingFang SC"/>
-                <a:cs typeface="PingFang SC"/>
+                <a:latin typeface="Alibaba PuHuiTi"/>
+                <a:ea typeface="Alibaba PuHuiTi"/>
+                <a:cs typeface="Alibaba PuHuiTi"/>
               </a:rPr>
               <a:t>它们的产品边界不同，但共同点很清楚：知识被包装成文件夹、说明、脚本和资源，由 agent 动态发现和使用。</a:t>
             </a:r>
@@ -6229,14 +6239,14 @@
       </p:sp>
       <p:pic>
         <p:nvPicPr>
-          <p:cNvPr id="29" name=""/>
+          <p:cNvPr id="33" name=""/>
           <p:cNvPicPr>
             <a:picLocks xmlns:a="http://schemas.openxmlformats.org/drawingml/2006/main" noChangeAspect="1"/>
           </p:cNvPicPr>
           <p:nvPr/>
         </p:nvPicPr>
         <p:blipFill>
-          <a:blip xmlns:r="http://schemas.openxmlformats.org/officeDocument/2006/relationships" xmlns:a="http://schemas.openxmlformats.org/drawingml/2006/main" r:embed="Rbc1bcf06b2174a3a"/>
+          <a:blip xmlns:r="http://schemas.openxmlformats.org/officeDocument/2006/relationships" xmlns:a="http://schemas.openxmlformats.org/drawingml/2006/main" r:embed="Rdadffc679d9c424a"/>
           <a:srcRect xmlns:a="http://schemas.openxmlformats.org/drawingml/2006/main" l="0" t="0" r="0" b="0"/>
           <a:stretch xmlns:a="http://schemas.openxmlformats.org/drawingml/2006/main">
             <a:fillRect l="0" t="0" r="0" b="0"/>
@@ -6256,14 +6266,14 @@
       </p:pic>
       <p:pic>
         <p:nvPicPr>
-          <p:cNvPr id="30" name=""/>
+          <p:cNvPr id="34" name=""/>
           <p:cNvPicPr>
             <a:picLocks xmlns:a="http://schemas.openxmlformats.org/drawingml/2006/main" noChangeAspect="1"/>
           </p:cNvPicPr>
           <p:nvPr/>
         </p:nvPicPr>
         <p:blipFill>
-          <a:blip xmlns:r="http://schemas.openxmlformats.org/officeDocument/2006/relationships" xmlns:a="http://schemas.openxmlformats.org/drawingml/2006/main" r:embed="R47b8b1d0d7c54c47"/>
+          <a:blip xmlns:r="http://schemas.openxmlformats.org/officeDocument/2006/relationships" xmlns:a="http://schemas.openxmlformats.org/drawingml/2006/main" r:embed="R1c0232a3aa904469"/>
           <a:srcRect xmlns:a="http://schemas.openxmlformats.org/drawingml/2006/main" l="0" t="0" r="0" b="0"/>
           <a:stretch xmlns:a="http://schemas.openxmlformats.org/drawingml/2006/main">
             <a:fillRect l="0" t="0" r="0" b="0"/>
@@ -6283,14 +6293,14 @@
       </p:pic>
       <p:pic>
         <p:nvPicPr>
-          <p:cNvPr id="31" name=""/>
+          <p:cNvPr id="35" name=""/>
           <p:cNvPicPr>
             <a:picLocks xmlns:a="http://schemas.openxmlformats.org/drawingml/2006/main" noChangeAspect="1"/>
           </p:cNvPicPr>
           <p:nvPr/>
         </p:nvPicPr>
         <p:blipFill>
-          <a:blip xmlns:r="http://schemas.openxmlformats.org/officeDocument/2006/relationships" xmlns:a="http://schemas.openxmlformats.org/drawingml/2006/main" r:embed="Rb317f1ac01344486"/>
+          <a:blip xmlns:r="http://schemas.openxmlformats.org/officeDocument/2006/relationships" xmlns:a="http://schemas.openxmlformats.org/drawingml/2006/main" r:embed="R658db514efeb45c4"/>
           <a:srcRect xmlns:a="http://schemas.openxmlformats.org/drawingml/2006/main" l="0" t="0" r="0" b="0"/>
           <a:stretch xmlns:a="http://schemas.openxmlformats.org/drawingml/2006/main">
             <a:fillRect l="0" t="0" r="0" b="0"/>
@@ -6401,9 +6411,9 @@
                 <a:solidFill>
                   <a:srgbClr val="000000"/>
                 </a:solidFill>
-                <a:latin typeface="Helvetica Neue"/>
-                <a:ea typeface="Helvetica Neue"/>
-                <a:cs typeface="Helvetica Neue"/>
+                <a:latin typeface="Alibaba PuHuiTi"/>
+                <a:ea typeface="Alibaba PuHuiTi"/>
+                <a:cs typeface="Alibaba PuHuiTi"/>
               </a:defRPr>
             </a:pPr>
             <a:r>
@@ -6411,9 +6421,9 @@
                 <a:solidFill>
                   <a:srgbClr val="111318"/>
                 </a:solidFill>
-                <a:latin typeface="PingFang SC"/>
-                <a:ea typeface="PingFang SC"/>
-                <a:cs typeface="PingFang SC"/>
+                <a:latin typeface="Alibaba PuHuiTi"/>
+                <a:ea typeface="Alibaba PuHuiTi"/>
+                <a:cs typeface="Alibaba PuHuiTi"/>
               </a:rPr>
               <a:t>Awesome 仓库正在变成
 agent behavior 的源代码</a:t>
@@ -6459,9 +6469,9 @@
                 <a:solidFill>
                   <a:srgbClr val="000000"/>
                 </a:solidFill>
-                <a:latin typeface="Helvetica Neue"/>
-                <a:ea typeface="Helvetica Neue"/>
-                <a:cs typeface="Helvetica Neue"/>
+                <a:latin typeface="Alibaba PuHuiTi"/>
+                <a:ea typeface="Alibaba PuHuiTi"/>
+                <a:cs typeface="Alibaba PuHuiTi"/>
               </a:defRPr>
             </a:pPr>
             <a:r>
@@ -6469,9 +6479,9 @@
                 <a:solidFill>
                   <a:srgbClr val="565D68"/>
                 </a:solidFill>
-                <a:latin typeface="PingFang SC"/>
-                <a:ea typeface="PingFang SC"/>
-                <a:cs typeface="PingFang SC"/>
+                <a:latin typeface="Alibaba PuHuiTi"/>
+                <a:ea typeface="Alibaba PuHuiTi"/>
+                <a:cs typeface="Alibaba PuHuiTi"/>
               </a:rPr>
               <a:t>Stars 仍然说明谁被看见。</a:t>
             </a:r>
@@ -6486,9 +6496,9 @@
                 <a:solidFill>
                   <a:srgbClr val="000000"/>
                 </a:solidFill>
-                <a:latin typeface="Helvetica Neue"/>
-                <a:ea typeface="Helvetica Neue"/>
-                <a:cs typeface="Helvetica Neue"/>
+                <a:latin typeface="Alibaba PuHuiTi"/>
+                <a:ea typeface="Alibaba PuHuiTi"/>
+                <a:cs typeface="Alibaba PuHuiTi"/>
               </a:defRPr>
             </a:pPr>
             <a:r>
@@ -6496,9 +6506,9 @@
                 <a:solidFill>
                   <a:srgbClr val="111318"/>
                 </a:solidFill>
-                <a:latin typeface="PingFang SC"/>
-                <a:ea typeface="PingFang SC"/>
-                <a:cs typeface="PingFang SC"/>
+                <a:latin typeface="Alibaba PuHuiTi"/>
+                <a:ea typeface="Alibaba PuHuiTi"/>
+                <a:cs typeface="Alibaba PuHuiTi"/>
               </a:rPr>
               <a:t>下一步要追踪：谁被安装，谁被 agent 调用。</a:t>
             </a:r>
@@ -6513,9 +6523,9 @@
                 <a:solidFill>
                   <a:srgbClr val="000000"/>
                 </a:solidFill>
-                <a:latin typeface="Helvetica Neue"/>
-                <a:ea typeface="Helvetica Neue"/>
-                <a:cs typeface="Helvetica Neue"/>
+                <a:latin typeface="Alibaba PuHuiTi"/>
+                <a:ea typeface="Alibaba PuHuiTi"/>
+                <a:cs typeface="Alibaba PuHuiTi"/>
               </a:defRPr>
             </a:pPr>
             <a:r>
@@ -6523,9 +6533,9 @@
                 <a:solidFill>
                   <a:srgbClr val="565D68"/>
                 </a:solidFill>
-                <a:latin typeface="PingFang SC"/>
-                <a:ea typeface="PingFang SC"/>
-                <a:cs typeface="PingFang SC"/>
+                <a:latin typeface="Alibaba PuHuiTi"/>
+                <a:ea typeface="Alibaba PuHuiTi"/>
+                <a:cs typeface="Alibaba PuHuiTi"/>
               </a:rPr>
               <a:t>这会让下一版 landscape 更接近真实使用。</a:t>
             </a:r>
@@ -6570,9 +6580,9 @@
                 <a:solidFill>
                   <a:srgbClr val="000000"/>
                 </a:solidFill>
-                <a:latin typeface="Helvetica Neue"/>
-                <a:ea typeface="Helvetica Neue"/>
-                <a:cs typeface="Helvetica Neue"/>
+                <a:latin typeface="Alibaba PuHuiTi"/>
+                <a:ea typeface="Alibaba PuHuiTi"/>
+                <a:cs typeface="Alibaba PuHuiTi"/>
               </a:defRPr>
             </a:pPr>
             <a:r>
@@ -6580,9 +6590,9 @@
                 <a:solidFill>
                   <a:srgbClr val="3D8DFF"/>
                 </a:solidFill>
-                <a:latin typeface="PingFang SC"/>
-                <a:ea typeface="PingFang SC"/>
-                <a:cs typeface="PingFang SC"/>
+                <a:latin typeface="Alibaba PuHuiTi"/>
+                <a:ea typeface="Alibaba PuHuiTi"/>
+                <a:cs typeface="Alibaba PuHuiTi"/>
               </a:rPr>
               <a:t>NEXT</a:t>
             </a:r>
@@ -6675,14 +6685,14 @@
     </a:clrScheme>
     <a:fontScheme name="Office">
       <a:majorFont>
-        <a:latin typeface="Calibri Light"/>
-        <a:ea typeface="Calibri Light"/>
-        <a:cs typeface="Calibri Light"/>
+        <a:latin typeface="Alibaba PuHuiTi"/>
+        <a:ea typeface="Alibaba PuHuiTi"/>
+        <a:cs typeface="Alibaba PuHuiTi"/>
       </a:majorFont>
       <a:minorFont>
-        <a:latin typeface="Calibri"/>
-        <a:ea typeface="Calibri"/>
-        <a:cs typeface="Calibri"/>
+        <a:latin typeface="Alibaba PuHuiTi"/>
+        <a:ea typeface="Alibaba PuHuiTi"/>
+        <a:cs typeface="Alibaba PuHuiTi"/>
       </a:minorFont>
     </a:fontScheme>
     <a:fmtScheme name="ChatGPT">
